--- a/docs/pptx/carbo/ritu-carbo-linsubhr-egfrdisc-anemia2.pptx
+++ b/docs/pptx/carbo/ritu-carbo-linsubhr-egfrdisc-anemia2.pptx
@@ -2443,7 +2443,7 @@
           </p:nvSpPr>
           <p:spPr>
             <a:xfrm>
-              <a:off x="1810493" y="2073503"/>
+              <a:off x="1813815" y="2073503"/>
               <a:ext cx="0" cy="3649639"/>
             </a:xfrm>
             <a:custGeom>
@@ -2486,7 +2486,7 @@
           </p:nvSpPr>
           <p:spPr>
             <a:xfrm>
-              <a:off x="4291851" y="2073503"/>
+              <a:off x="4291714" y="2073503"/>
               <a:ext cx="0" cy="3649639"/>
             </a:xfrm>
             <a:custGeom>
@@ -2529,7 +2529,7 @@
           </p:nvSpPr>
           <p:spPr>
             <a:xfrm>
-              <a:off x="6773208" y="2073503"/>
+              <a:off x="6769614" y="2073503"/>
               <a:ext cx="0" cy="3649639"/>
             </a:xfrm>
             <a:custGeom>
@@ -2787,7 +2787,7 @@
           </p:nvSpPr>
           <p:spPr>
             <a:xfrm>
-              <a:off x="3051172" y="2073503"/>
+              <a:off x="3052764" y="2073503"/>
               <a:ext cx="0" cy="3649639"/>
             </a:xfrm>
             <a:custGeom>
@@ -2830,7 +2830,7 @@
           </p:nvSpPr>
           <p:spPr>
             <a:xfrm>
-              <a:off x="5532530" y="2073503"/>
+              <a:off x="5530664" y="2073503"/>
               <a:ext cx="0" cy="3649639"/>
             </a:xfrm>
             <a:custGeom>
@@ -2873,7 +2873,7 @@
           </p:nvSpPr>
           <p:spPr>
             <a:xfrm>
-              <a:off x="8013887" y="2073503"/>
+              <a:off x="8008563" y="2073503"/>
               <a:ext cx="0" cy="3649639"/>
             </a:xfrm>
             <a:custGeom>
@@ -2916,612 +2916,612 @@
           </p:nvSpPr>
           <p:spPr>
             <a:xfrm>
-              <a:off x="1172049" y="2822884"/>
-              <a:ext cx="7090630" cy="2323107"/>
+              <a:off x="1172049" y="2713653"/>
+              <a:ext cx="7090630" cy="2438257"/>
             </a:xfrm>
             <a:custGeom>
               <a:avLst/>
               <a:pathLst>
-                <a:path w="7090630" h="2323107">
+                <a:path w="7090630" h="2438257">
                   <a:moveTo>
                     <a:pt x="0" y="0"/>
                   </a:moveTo>
                   <a:lnTo>
-                    <a:pt x="71622" y="51826"/>
-                  </a:lnTo>
-                  <a:lnTo>
-                    <a:pt x="143245" y="102670"/>
-                  </a:lnTo>
-                  <a:lnTo>
-                    <a:pt x="214867" y="152551"/>
-                  </a:lnTo>
-                  <a:lnTo>
-                    <a:pt x="286490" y="201486"/>
-                  </a:lnTo>
-                  <a:lnTo>
-                    <a:pt x="358112" y="249494"/>
-                  </a:lnTo>
-                  <a:lnTo>
-                    <a:pt x="429735" y="296591"/>
-                  </a:lnTo>
-                  <a:lnTo>
-                    <a:pt x="501357" y="342796"/>
-                  </a:lnTo>
-                  <a:lnTo>
-                    <a:pt x="572980" y="388126"/>
-                  </a:lnTo>
-                  <a:lnTo>
-                    <a:pt x="644602" y="432596"/>
-                  </a:lnTo>
-                  <a:lnTo>
-                    <a:pt x="716225" y="476223"/>
-                  </a:lnTo>
-                  <a:lnTo>
-                    <a:pt x="787847" y="519023"/>
-                  </a:lnTo>
-                  <a:lnTo>
-                    <a:pt x="859470" y="561012"/>
-                  </a:lnTo>
-                  <a:lnTo>
-                    <a:pt x="931092" y="602205"/>
-                  </a:lnTo>
-                  <a:lnTo>
-                    <a:pt x="1002715" y="642618"/>
-                  </a:lnTo>
-                  <a:lnTo>
-                    <a:pt x="1074337" y="682264"/>
-                  </a:lnTo>
-                  <a:lnTo>
-                    <a:pt x="1145960" y="721159"/>
-                  </a:lnTo>
-                  <a:lnTo>
-                    <a:pt x="1217582" y="759317"/>
-                  </a:lnTo>
-                  <a:lnTo>
-                    <a:pt x="1289205" y="796752"/>
-                  </a:lnTo>
-                  <a:lnTo>
-                    <a:pt x="1360827" y="833477"/>
-                  </a:lnTo>
-                  <a:lnTo>
-                    <a:pt x="1432450" y="869506"/>
-                  </a:lnTo>
-                  <a:lnTo>
-                    <a:pt x="1504073" y="904852"/>
-                  </a:lnTo>
-                  <a:lnTo>
-                    <a:pt x="1575695" y="939528"/>
-                  </a:lnTo>
-                  <a:lnTo>
-                    <a:pt x="1647318" y="973547"/>
-                  </a:lnTo>
-                  <a:lnTo>
-                    <a:pt x="1718940" y="1006921"/>
-                  </a:lnTo>
-                  <a:lnTo>
-                    <a:pt x="1790563" y="1039663"/>
-                  </a:lnTo>
-                  <a:lnTo>
-                    <a:pt x="1862185" y="1071784"/>
-                  </a:lnTo>
-                  <a:lnTo>
-                    <a:pt x="1933808" y="1103296"/>
-                  </a:lnTo>
-                  <a:lnTo>
-                    <a:pt x="2005430" y="1134211"/>
-                  </a:lnTo>
-                  <a:lnTo>
-                    <a:pt x="2077053" y="1164540"/>
-                  </a:lnTo>
-                  <a:lnTo>
-                    <a:pt x="2148675" y="1194294"/>
-                  </a:lnTo>
-                  <a:lnTo>
-                    <a:pt x="2220298" y="1223484"/>
-                  </a:lnTo>
-                  <a:lnTo>
-                    <a:pt x="2291920" y="1252121"/>
-                  </a:lnTo>
-                  <a:lnTo>
-                    <a:pt x="2363543" y="1280215"/>
-                  </a:lnTo>
-                  <a:lnTo>
-                    <a:pt x="2435165" y="1307777"/>
-                  </a:lnTo>
-                  <a:lnTo>
-                    <a:pt x="2506788" y="1334816"/>
-                  </a:lnTo>
-                  <a:lnTo>
-                    <a:pt x="2578410" y="1361343"/>
-                  </a:lnTo>
-                  <a:lnTo>
-                    <a:pt x="2650033" y="1387367"/>
-                  </a:lnTo>
-                  <a:lnTo>
-                    <a:pt x="2721655" y="1412897"/>
-                  </a:lnTo>
-                  <a:lnTo>
-                    <a:pt x="2793278" y="1437944"/>
-                  </a:lnTo>
-                  <a:lnTo>
-                    <a:pt x="2864901" y="1462516"/>
-                  </a:lnTo>
-                  <a:lnTo>
-                    <a:pt x="2936523" y="1486623"/>
-                  </a:lnTo>
-                  <a:lnTo>
-                    <a:pt x="3008146" y="1510272"/>
-                  </a:lnTo>
-                  <a:lnTo>
-                    <a:pt x="3079768" y="1533473"/>
-                  </a:lnTo>
-                  <a:lnTo>
-                    <a:pt x="3151391" y="1556235"/>
-                  </a:lnTo>
-                  <a:lnTo>
-                    <a:pt x="3223013" y="1578565"/>
-                  </a:lnTo>
-                  <a:lnTo>
-                    <a:pt x="3294636" y="1600471"/>
-                  </a:lnTo>
-                  <a:lnTo>
-                    <a:pt x="3366258" y="1621963"/>
-                  </a:lnTo>
-                  <a:lnTo>
-                    <a:pt x="3437881" y="1643047"/>
-                  </a:lnTo>
-                  <a:lnTo>
-                    <a:pt x="3509503" y="1663732"/>
-                  </a:lnTo>
-                  <a:lnTo>
-                    <a:pt x="3581126" y="1684024"/>
-                  </a:lnTo>
-                  <a:lnTo>
-                    <a:pt x="3652748" y="1703932"/>
-                  </a:lnTo>
-                  <a:lnTo>
-                    <a:pt x="3724371" y="1723463"/>
-                  </a:lnTo>
-                  <a:lnTo>
-                    <a:pt x="3795993" y="1742623"/>
-                  </a:lnTo>
-                  <a:lnTo>
-                    <a:pt x="3867616" y="1761420"/>
-                  </a:lnTo>
-                  <a:lnTo>
-                    <a:pt x="3939238" y="1779861"/>
-                  </a:lnTo>
-                  <a:lnTo>
-                    <a:pt x="4010861" y="1797953"/>
-                  </a:lnTo>
-                  <a:lnTo>
-                    <a:pt x="4082483" y="1815701"/>
-                  </a:lnTo>
-                  <a:lnTo>
-                    <a:pt x="4154106" y="1833114"/>
-                  </a:lnTo>
-                  <a:lnTo>
-                    <a:pt x="4225729" y="1850196"/>
-                  </a:lnTo>
-                  <a:lnTo>
-                    <a:pt x="4297351" y="1866954"/>
-                  </a:lnTo>
-                  <a:lnTo>
-                    <a:pt x="4368974" y="1883395"/>
-                  </a:lnTo>
-                  <a:lnTo>
-                    <a:pt x="4440596" y="1899524"/>
-                  </a:lnTo>
-                  <a:lnTo>
-                    <a:pt x="4512219" y="1899991"/>
-                  </a:lnTo>
-                  <a:lnTo>
-                    <a:pt x="4583841" y="1892522"/>
-                  </a:lnTo>
-                  <a:lnTo>
-                    <a:pt x="4655464" y="1884986"/>
-                  </a:lnTo>
-                  <a:lnTo>
-                    <a:pt x="4727086" y="1877383"/>
-                  </a:lnTo>
-                  <a:lnTo>
-                    <a:pt x="4798709" y="1869711"/>
-                  </a:lnTo>
-                  <a:lnTo>
-                    <a:pt x="4870331" y="1861971"/>
-                  </a:lnTo>
-                  <a:lnTo>
-                    <a:pt x="4941954" y="1854162"/>
-                  </a:lnTo>
-                  <a:lnTo>
-                    <a:pt x="5013576" y="1846283"/>
-                  </a:lnTo>
-                  <a:lnTo>
-                    <a:pt x="5085199" y="1838333"/>
-                  </a:lnTo>
-                  <a:lnTo>
-                    <a:pt x="5156821" y="1830312"/>
-                  </a:lnTo>
-                  <a:lnTo>
-                    <a:pt x="5228444" y="1822220"/>
-                  </a:lnTo>
-                  <a:lnTo>
-                    <a:pt x="5300066" y="1814055"/>
-                  </a:lnTo>
-                  <a:lnTo>
-                    <a:pt x="5371689" y="1805817"/>
-                  </a:lnTo>
-                  <a:lnTo>
-                    <a:pt x="5443311" y="1797505"/>
-                  </a:lnTo>
-                  <a:lnTo>
-                    <a:pt x="5514934" y="1789118"/>
-                  </a:lnTo>
-                  <a:lnTo>
-                    <a:pt x="5586557" y="1780657"/>
-                  </a:lnTo>
-                  <a:lnTo>
-                    <a:pt x="5658179" y="1772120"/>
-                  </a:lnTo>
-                  <a:lnTo>
-                    <a:pt x="5729802" y="1763506"/>
-                  </a:lnTo>
-                  <a:lnTo>
-                    <a:pt x="5801424" y="1754816"/>
-                  </a:lnTo>
-                  <a:lnTo>
-                    <a:pt x="5873047" y="1746047"/>
-                  </a:lnTo>
-                  <a:lnTo>
-                    <a:pt x="5944669" y="1737200"/>
-                  </a:lnTo>
-                  <a:lnTo>
-                    <a:pt x="6016292" y="1728274"/>
-                  </a:lnTo>
-                  <a:lnTo>
-                    <a:pt x="6087914" y="1719268"/>
-                  </a:lnTo>
-                  <a:lnTo>
-                    <a:pt x="6159537" y="1710181"/>
-                  </a:lnTo>
-                  <a:lnTo>
-                    <a:pt x="6231159" y="1701013"/>
-                  </a:lnTo>
-                  <a:lnTo>
-                    <a:pt x="6302782" y="1691763"/>
-                  </a:lnTo>
-                  <a:lnTo>
-                    <a:pt x="6374404" y="1682430"/>
-                  </a:lnTo>
-                  <a:lnTo>
-                    <a:pt x="6446027" y="1673014"/>
-                  </a:lnTo>
-                  <a:lnTo>
-                    <a:pt x="6517649" y="1663513"/>
-                  </a:lnTo>
-                  <a:lnTo>
-                    <a:pt x="6589272" y="1653927"/>
-                  </a:lnTo>
-                  <a:lnTo>
-                    <a:pt x="6660894" y="1644256"/>
-                  </a:lnTo>
-                  <a:lnTo>
-                    <a:pt x="6732517" y="1634498"/>
-                  </a:lnTo>
-                  <a:lnTo>
-                    <a:pt x="6804139" y="1624652"/>
-                  </a:lnTo>
-                  <a:lnTo>
-                    <a:pt x="6875762" y="1614719"/>
-                  </a:lnTo>
-                  <a:lnTo>
-                    <a:pt x="6947385" y="1604696"/>
-                  </a:lnTo>
-                  <a:lnTo>
-                    <a:pt x="7019007" y="1594584"/>
-                  </a:lnTo>
-                  <a:lnTo>
-                    <a:pt x="7090630" y="1584381"/>
-                  </a:lnTo>
-                  <a:lnTo>
-                    <a:pt x="7090630" y="2323107"/>
-                  </a:lnTo>
-                  <a:lnTo>
-                    <a:pt x="7019007" y="2315161"/>
-                  </a:lnTo>
-                  <a:lnTo>
-                    <a:pt x="6947385" y="2307062"/>
-                  </a:lnTo>
-                  <a:lnTo>
-                    <a:pt x="6875762" y="2298807"/>
-                  </a:lnTo>
-                  <a:lnTo>
-                    <a:pt x="6804139" y="2290392"/>
-                  </a:lnTo>
-                  <a:lnTo>
-                    <a:pt x="6732517" y="2281814"/>
-                  </a:lnTo>
-                  <a:lnTo>
-                    <a:pt x="6660894" y="2273071"/>
-                  </a:lnTo>
-                  <a:lnTo>
-                    <a:pt x="6589272" y="2264159"/>
-                  </a:lnTo>
-                  <a:lnTo>
-                    <a:pt x="6517649" y="2255075"/>
-                  </a:lnTo>
-                  <a:lnTo>
-                    <a:pt x="6446027" y="2245815"/>
-                  </a:lnTo>
-                  <a:lnTo>
-                    <a:pt x="6374404" y="2236376"/>
-                  </a:lnTo>
-                  <a:lnTo>
-                    <a:pt x="6302782" y="2226755"/>
-                  </a:lnTo>
-                  <a:lnTo>
-                    <a:pt x="6231159" y="2216948"/>
-                  </a:lnTo>
-                  <a:lnTo>
-                    <a:pt x="6159537" y="2206951"/>
-                  </a:lnTo>
-                  <a:lnTo>
-                    <a:pt x="6087914" y="2196762"/>
-                  </a:lnTo>
-                  <a:lnTo>
-                    <a:pt x="6016292" y="2186375"/>
-                  </a:lnTo>
-                  <a:lnTo>
-                    <a:pt x="5944669" y="2175788"/>
-                  </a:lnTo>
-                  <a:lnTo>
-                    <a:pt x="5873047" y="2164997"/>
-                  </a:lnTo>
-                  <a:lnTo>
-                    <a:pt x="5801424" y="2153996"/>
-                  </a:lnTo>
-                  <a:lnTo>
-                    <a:pt x="5729802" y="2142784"/>
-                  </a:lnTo>
-                  <a:lnTo>
-                    <a:pt x="5658179" y="2131354"/>
-                  </a:lnTo>
-                  <a:lnTo>
-                    <a:pt x="5586557" y="2119704"/>
-                  </a:lnTo>
-                  <a:lnTo>
-                    <a:pt x="5514934" y="2107829"/>
-                  </a:lnTo>
-                  <a:lnTo>
-                    <a:pt x="5443311" y="2095724"/>
-                  </a:lnTo>
-                  <a:lnTo>
-                    <a:pt x="5371689" y="2083386"/>
-                  </a:lnTo>
-                  <a:lnTo>
-                    <a:pt x="5300066" y="2070809"/>
-                  </a:lnTo>
-                  <a:lnTo>
-                    <a:pt x="5228444" y="2057989"/>
-                  </a:lnTo>
-                  <a:lnTo>
-                    <a:pt x="5156821" y="2044922"/>
-                  </a:lnTo>
-                  <a:lnTo>
-                    <a:pt x="5085199" y="2031602"/>
-                  </a:lnTo>
-                  <a:lnTo>
-                    <a:pt x="5013576" y="2018024"/>
-                  </a:lnTo>
-                  <a:lnTo>
-                    <a:pt x="4941954" y="2004185"/>
-                  </a:lnTo>
-                  <a:lnTo>
-                    <a:pt x="4870331" y="1990077"/>
-                  </a:lnTo>
-                  <a:lnTo>
-                    <a:pt x="4798709" y="1975698"/>
-                  </a:lnTo>
-                  <a:lnTo>
-                    <a:pt x="4727086" y="1961040"/>
-                  </a:lnTo>
-                  <a:lnTo>
-                    <a:pt x="4655464" y="1946100"/>
-                  </a:lnTo>
-                  <a:lnTo>
-                    <a:pt x="4583841" y="1930871"/>
-                  </a:lnTo>
-                  <a:lnTo>
-                    <a:pt x="4512219" y="1915347"/>
-                  </a:lnTo>
-                  <a:lnTo>
-                    <a:pt x="4440596" y="1907393"/>
-                  </a:lnTo>
-                  <a:lnTo>
-                    <a:pt x="4368974" y="1914730"/>
-                  </a:lnTo>
-                  <a:lnTo>
-                    <a:pt x="4297351" y="1922002"/>
-                  </a:lnTo>
-                  <a:lnTo>
-                    <a:pt x="4225729" y="1929210"/>
-                  </a:lnTo>
-                  <a:lnTo>
-                    <a:pt x="4154106" y="1936353"/>
-                  </a:lnTo>
-                  <a:lnTo>
-                    <a:pt x="4082483" y="1943433"/>
-                  </a:lnTo>
-                  <a:lnTo>
-                    <a:pt x="4010861" y="1950450"/>
-                  </a:lnTo>
-                  <a:lnTo>
-                    <a:pt x="3939238" y="1957405"/>
-                  </a:lnTo>
-                  <a:lnTo>
-                    <a:pt x="3867616" y="1964298"/>
-                  </a:lnTo>
-                  <a:lnTo>
-                    <a:pt x="3795993" y="1971131"/>
-                  </a:lnTo>
-                  <a:lnTo>
-                    <a:pt x="3724371" y="1977902"/>
-                  </a:lnTo>
-                  <a:lnTo>
-                    <a:pt x="3652748" y="1984613"/>
-                  </a:lnTo>
-                  <a:lnTo>
-                    <a:pt x="3581126" y="1991265"/>
-                  </a:lnTo>
-                  <a:lnTo>
-                    <a:pt x="3509503" y="1997858"/>
-                  </a:lnTo>
-                  <a:lnTo>
-                    <a:pt x="3437881" y="2004393"/>
-                  </a:lnTo>
-                  <a:lnTo>
-                    <a:pt x="3366258" y="2010869"/>
-                  </a:lnTo>
-                  <a:lnTo>
-                    <a:pt x="3294636" y="2017288"/>
-                  </a:lnTo>
-                  <a:lnTo>
-                    <a:pt x="3223013" y="2023650"/>
-                  </a:lnTo>
-                  <a:lnTo>
-                    <a:pt x="3151391" y="2029955"/>
-                  </a:lnTo>
-                  <a:lnTo>
-                    <a:pt x="3079768" y="2036205"/>
-                  </a:lnTo>
-                  <a:lnTo>
-                    <a:pt x="3008146" y="2042399"/>
-                  </a:lnTo>
-                  <a:lnTo>
-                    <a:pt x="2936523" y="2048538"/>
-                  </a:lnTo>
-                  <a:lnTo>
-                    <a:pt x="2864901" y="2054623"/>
-                  </a:lnTo>
-                  <a:lnTo>
-                    <a:pt x="2793278" y="2060654"/>
-                  </a:lnTo>
-                  <a:lnTo>
-                    <a:pt x="2721655" y="2066631"/>
-                  </a:lnTo>
-                  <a:lnTo>
-                    <a:pt x="2650033" y="2072555"/>
-                  </a:lnTo>
-                  <a:lnTo>
-                    <a:pt x="2578410" y="2078427"/>
-                  </a:lnTo>
-                  <a:lnTo>
-                    <a:pt x="2506788" y="2084246"/>
-                  </a:lnTo>
-                  <a:lnTo>
-                    <a:pt x="2435165" y="2090014"/>
-                  </a:lnTo>
-                  <a:lnTo>
-                    <a:pt x="2363543" y="2095731"/>
-                  </a:lnTo>
-                  <a:lnTo>
-                    <a:pt x="2291920" y="2101397"/>
-                  </a:lnTo>
-                  <a:lnTo>
-                    <a:pt x="2220298" y="2107013"/>
-                  </a:lnTo>
-                  <a:lnTo>
-                    <a:pt x="2148675" y="2112579"/>
-                  </a:lnTo>
-                  <a:lnTo>
-                    <a:pt x="2077053" y="2118095"/>
-                  </a:lnTo>
-                  <a:lnTo>
-                    <a:pt x="2005430" y="2123563"/>
-                  </a:lnTo>
-                  <a:lnTo>
-                    <a:pt x="1933808" y="2128982"/>
-                  </a:lnTo>
-                  <a:lnTo>
-                    <a:pt x="1862185" y="2134353"/>
-                  </a:lnTo>
-                  <a:lnTo>
-                    <a:pt x="1790563" y="2139676"/>
-                  </a:lnTo>
-                  <a:lnTo>
-                    <a:pt x="1718940" y="2144953"/>
-                  </a:lnTo>
-                  <a:lnTo>
-                    <a:pt x="1647318" y="2150182"/>
-                  </a:lnTo>
-                  <a:lnTo>
-                    <a:pt x="1575695" y="2155365"/>
-                  </a:lnTo>
-                  <a:lnTo>
-                    <a:pt x="1504073" y="2160502"/>
-                  </a:lnTo>
-                  <a:lnTo>
-                    <a:pt x="1432450" y="2165593"/>
-                  </a:lnTo>
-                  <a:lnTo>
-                    <a:pt x="1360827" y="2170639"/>
-                  </a:lnTo>
-                  <a:lnTo>
-                    <a:pt x="1289205" y="2175641"/>
-                  </a:lnTo>
-                  <a:lnTo>
-                    <a:pt x="1217582" y="2180598"/>
-                  </a:lnTo>
-                  <a:lnTo>
-                    <a:pt x="1145960" y="2185511"/>
-                  </a:lnTo>
-                  <a:lnTo>
-                    <a:pt x="1074337" y="2190380"/>
-                  </a:lnTo>
-                  <a:lnTo>
-                    <a:pt x="1002715" y="2195207"/>
-                  </a:lnTo>
-                  <a:lnTo>
-                    <a:pt x="931092" y="2199990"/>
-                  </a:lnTo>
-                  <a:lnTo>
-                    <a:pt x="859470" y="2204731"/>
-                  </a:lnTo>
-                  <a:lnTo>
-                    <a:pt x="787847" y="2209430"/>
-                  </a:lnTo>
-                  <a:lnTo>
-                    <a:pt x="716225" y="2214087"/>
-                  </a:lnTo>
-                  <a:lnTo>
-                    <a:pt x="644602" y="2218703"/>
-                  </a:lnTo>
-                  <a:lnTo>
-                    <a:pt x="572980" y="2223278"/>
-                  </a:lnTo>
-                  <a:lnTo>
-                    <a:pt x="501357" y="2227813"/>
-                  </a:lnTo>
-                  <a:lnTo>
-                    <a:pt x="429735" y="2232307"/>
-                  </a:lnTo>
-                  <a:lnTo>
-                    <a:pt x="358112" y="2236761"/>
-                  </a:lnTo>
-                  <a:lnTo>
-                    <a:pt x="286490" y="2241176"/>
-                  </a:lnTo>
-                  <a:lnTo>
-                    <a:pt x="214867" y="2245552"/>
-                  </a:lnTo>
-                  <a:lnTo>
-                    <a:pt x="143245" y="2249889"/>
-                  </a:lnTo>
-                  <a:lnTo>
-                    <a:pt x="71622" y="2254187"/>
-                  </a:lnTo>
-                  <a:lnTo>
-                    <a:pt x="0" y="2258447"/>
+                    <a:pt x="71622" y="55408"/>
+                  </a:lnTo>
+                  <a:lnTo>
+                    <a:pt x="143245" y="109737"/>
+                  </a:lnTo>
+                  <a:lnTo>
+                    <a:pt x="214867" y="163008"/>
+                  </a:lnTo>
+                  <a:lnTo>
+                    <a:pt x="286490" y="215240"/>
+                  </a:lnTo>
+                  <a:lnTo>
+                    <a:pt x="358112" y="266455"/>
+                  </a:lnTo>
+                  <a:lnTo>
+                    <a:pt x="429735" y="316671"/>
+                  </a:lnTo>
+                  <a:lnTo>
+                    <a:pt x="501357" y="365910"/>
+                  </a:lnTo>
+                  <a:lnTo>
+                    <a:pt x="572980" y="414188"/>
+                  </a:lnTo>
+                  <a:lnTo>
+                    <a:pt x="644602" y="461527"/>
+                  </a:lnTo>
+                  <a:lnTo>
+                    <a:pt x="716225" y="507942"/>
+                  </a:lnTo>
+                  <a:lnTo>
+                    <a:pt x="787847" y="553453"/>
+                  </a:lnTo>
+                  <a:lnTo>
+                    <a:pt x="859470" y="598078"/>
+                  </a:lnTo>
+                  <a:lnTo>
+                    <a:pt x="931092" y="641833"/>
+                  </a:lnTo>
+                  <a:lnTo>
+                    <a:pt x="1002715" y="684735"/>
+                  </a:lnTo>
+                  <a:lnTo>
+                    <a:pt x="1074337" y="726801"/>
+                  </a:lnTo>
+                  <a:lnTo>
+                    <a:pt x="1145960" y="768048"/>
+                  </a:lnTo>
+                  <a:lnTo>
+                    <a:pt x="1217582" y="808491"/>
+                  </a:lnTo>
+                  <a:lnTo>
+                    <a:pt x="1289205" y="848146"/>
+                  </a:lnTo>
+                  <a:lnTo>
+                    <a:pt x="1360827" y="887028"/>
+                  </a:lnTo>
+                  <a:lnTo>
+                    <a:pt x="1432450" y="925153"/>
+                  </a:lnTo>
+                  <a:lnTo>
+                    <a:pt x="1504073" y="962534"/>
+                  </a:lnTo>
+                  <a:lnTo>
+                    <a:pt x="1575695" y="999188"/>
+                  </a:lnTo>
+                  <a:lnTo>
+                    <a:pt x="1647318" y="1035127"/>
+                  </a:lnTo>
+                  <a:lnTo>
+                    <a:pt x="1718940" y="1070366"/>
+                  </a:lnTo>
+                  <a:lnTo>
+                    <a:pt x="1790563" y="1104918"/>
+                  </a:lnTo>
+                  <a:lnTo>
+                    <a:pt x="1862185" y="1138797"/>
+                  </a:lnTo>
+                  <a:lnTo>
+                    <a:pt x="1933808" y="1172015"/>
+                  </a:lnTo>
+                  <a:lnTo>
+                    <a:pt x="2005430" y="1204587"/>
+                  </a:lnTo>
+                  <a:lnTo>
+                    <a:pt x="2077053" y="1236524"/>
+                  </a:lnTo>
+                  <a:lnTo>
+                    <a:pt x="2148675" y="1267838"/>
+                  </a:lnTo>
+                  <a:lnTo>
+                    <a:pt x="2220298" y="1298543"/>
+                  </a:lnTo>
+                  <a:lnTo>
+                    <a:pt x="2291920" y="1328649"/>
+                  </a:lnTo>
+                  <a:lnTo>
+                    <a:pt x="2363543" y="1358168"/>
+                  </a:lnTo>
+                  <a:lnTo>
+                    <a:pt x="2435165" y="1387112"/>
+                  </a:lnTo>
+                  <a:lnTo>
+                    <a:pt x="2506788" y="1415492"/>
+                  </a:lnTo>
+                  <a:lnTo>
+                    <a:pt x="2578410" y="1443320"/>
+                  </a:lnTo>
+                  <a:lnTo>
+                    <a:pt x="2650033" y="1470605"/>
+                  </a:lnTo>
+                  <a:lnTo>
+                    <a:pt x="2721655" y="1497358"/>
+                  </a:lnTo>
+                  <a:lnTo>
+                    <a:pt x="2793278" y="1523590"/>
+                  </a:lnTo>
+                  <a:lnTo>
+                    <a:pt x="2864901" y="1549311"/>
+                  </a:lnTo>
+                  <a:lnTo>
+                    <a:pt x="2936523" y="1574531"/>
+                  </a:lnTo>
+                  <a:lnTo>
+                    <a:pt x="3008146" y="1599259"/>
+                  </a:lnTo>
+                  <a:lnTo>
+                    <a:pt x="3079768" y="1623505"/>
+                  </a:lnTo>
+                  <a:lnTo>
+                    <a:pt x="3151391" y="1647279"/>
+                  </a:lnTo>
+                  <a:lnTo>
+                    <a:pt x="3223013" y="1670590"/>
+                  </a:lnTo>
+                  <a:lnTo>
+                    <a:pt x="3294636" y="1693447"/>
+                  </a:lnTo>
+                  <a:lnTo>
+                    <a:pt x="3366258" y="1715858"/>
+                  </a:lnTo>
+                  <a:lnTo>
+                    <a:pt x="3437881" y="1737832"/>
+                  </a:lnTo>
+                  <a:lnTo>
+                    <a:pt x="3509503" y="1759379"/>
+                  </a:lnTo>
+                  <a:lnTo>
+                    <a:pt x="3581126" y="1780505"/>
+                  </a:lnTo>
+                  <a:lnTo>
+                    <a:pt x="3652748" y="1801220"/>
+                  </a:lnTo>
+                  <a:lnTo>
+                    <a:pt x="3724371" y="1821531"/>
+                  </a:lnTo>
+                  <a:lnTo>
+                    <a:pt x="3795993" y="1841446"/>
+                  </a:lnTo>
+                  <a:lnTo>
+                    <a:pt x="3867616" y="1860974"/>
+                  </a:lnTo>
+                  <a:lnTo>
+                    <a:pt x="3939238" y="1880120"/>
+                  </a:lnTo>
+                  <a:lnTo>
+                    <a:pt x="4010861" y="1898894"/>
+                  </a:lnTo>
+                  <a:lnTo>
+                    <a:pt x="4082483" y="1917302"/>
+                  </a:lnTo>
+                  <a:lnTo>
+                    <a:pt x="4154106" y="1935351"/>
+                  </a:lnTo>
+                  <a:lnTo>
+                    <a:pt x="4225729" y="1953049"/>
+                  </a:lnTo>
+                  <a:lnTo>
+                    <a:pt x="4297351" y="1970402"/>
+                  </a:lnTo>
+                  <a:lnTo>
+                    <a:pt x="4368974" y="1987416"/>
+                  </a:lnTo>
+                  <a:lnTo>
+                    <a:pt x="4440596" y="2004099"/>
+                  </a:lnTo>
+                  <a:lnTo>
+                    <a:pt x="4512219" y="2011434"/>
+                  </a:lnTo>
+                  <a:lnTo>
+                    <a:pt x="4583841" y="2004455"/>
+                  </a:lnTo>
+                  <a:lnTo>
+                    <a:pt x="4655464" y="1997417"/>
+                  </a:lnTo>
+                  <a:lnTo>
+                    <a:pt x="4727086" y="1990320"/>
+                  </a:lnTo>
+                  <a:lnTo>
+                    <a:pt x="4798709" y="1983164"/>
+                  </a:lnTo>
+                  <a:lnTo>
+                    <a:pt x="4870331" y="1975948"/>
+                  </a:lnTo>
+                  <a:lnTo>
+                    <a:pt x="4941954" y="1968671"/>
+                  </a:lnTo>
+                  <a:lnTo>
+                    <a:pt x="5013576" y="1961333"/>
+                  </a:lnTo>
+                  <a:lnTo>
+                    <a:pt x="5085199" y="1953934"/>
+                  </a:lnTo>
+                  <a:lnTo>
+                    <a:pt x="5156821" y="1946473"/>
+                  </a:lnTo>
+                  <a:lnTo>
+                    <a:pt x="5228444" y="1938949"/>
+                  </a:lnTo>
+                  <a:lnTo>
+                    <a:pt x="5300066" y="1931362"/>
+                  </a:lnTo>
+                  <a:lnTo>
+                    <a:pt x="5371689" y="1923711"/>
+                  </a:lnTo>
+                  <a:lnTo>
+                    <a:pt x="5443311" y="1915996"/>
+                  </a:lnTo>
+                  <a:lnTo>
+                    <a:pt x="5514934" y="1908216"/>
+                  </a:lnTo>
+                  <a:lnTo>
+                    <a:pt x="5586557" y="1900372"/>
+                  </a:lnTo>
+                  <a:lnTo>
+                    <a:pt x="5658179" y="1892461"/>
+                  </a:lnTo>
+                  <a:lnTo>
+                    <a:pt x="5729802" y="1884484"/>
+                  </a:lnTo>
+                  <a:lnTo>
+                    <a:pt x="5801424" y="1876440"/>
+                  </a:lnTo>
+                  <a:lnTo>
+                    <a:pt x="5873047" y="1868329"/>
+                  </a:lnTo>
+                  <a:lnTo>
+                    <a:pt x="5944669" y="1860150"/>
+                  </a:lnTo>
+                  <a:lnTo>
+                    <a:pt x="6016292" y="1851902"/>
+                  </a:lnTo>
+                  <a:lnTo>
+                    <a:pt x="6087914" y="1843584"/>
+                  </a:lnTo>
+                  <a:lnTo>
+                    <a:pt x="6159537" y="1835198"/>
+                  </a:lnTo>
+                  <a:lnTo>
+                    <a:pt x="6231159" y="1826740"/>
+                  </a:lnTo>
+                  <a:lnTo>
+                    <a:pt x="6302782" y="1818212"/>
+                  </a:lnTo>
+                  <a:lnTo>
+                    <a:pt x="6374404" y="1809613"/>
+                  </a:lnTo>
+                  <a:lnTo>
+                    <a:pt x="6446027" y="1800941"/>
+                  </a:lnTo>
+                  <a:lnTo>
+                    <a:pt x="6517649" y="1792196"/>
+                  </a:lnTo>
+                  <a:lnTo>
+                    <a:pt x="6589272" y="1783378"/>
+                  </a:lnTo>
+                  <a:lnTo>
+                    <a:pt x="6660894" y="1774487"/>
+                  </a:lnTo>
+                  <a:lnTo>
+                    <a:pt x="6732517" y="1765520"/>
+                  </a:lnTo>
+                  <a:lnTo>
+                    <a:pt x="6804139" y="1756479"/>
+                  </a:lnTo>
+                  <a:lnTo>
+                    <a:pt x="6875762" y="1747361"/>
+                  </a:lnTo>
+                  <a:lnTo>
+                    <a:pt x="6947385" y="1738167"/>
+                  </a:lnTo>
+                  <a:lnTo>
+                    <a:pt x="7019007" y="1728896"/>
+                  </a:lnTo>
+                  <a:lnTo>
+                    <a:pt x="7090630" y="1719548"/>
+                  </a:lnTo>
+                  <a:lnTo>
+                    <a:pt x="7090630" y="2438257"/>
+                  </a:lnTo>
+                  <a:lnTo>
+                    <a:pt x="7019007" y="2430202"/>
+                  </a:lnTo>
+                  <a:lnTo>
+                    <a:pt x="6947385" y="2421986"/>
+                  </a:lnTo>
+                  <a:lnTo>
+                    <a:pt x="6875762" y="2413608"/>
+                  </a:lnTo>
+                  <a:lnTo>
+                    <a:pt x="6804139" y="2405063"/>
+                  </a:lnTo>
+                  <a:lnTo>
+                    <a:pt x="6732517" y="2396348"/>
+                  </a:lnTo>
+                  <a:lnTo>
+                    <a:pt x="6660894" y="2387460"/>
+                  </a:lnTo>
+                  <a:lnTo>
+                    <a:pt x="6589272" y="2378395"/>
+                  </a:lnTo>
+                  <a:lnTo>
+                    <a:pt x="6517649" y="2369151"/>
+                  </a:lnTo>
+                  <a:lnTo>
+                    <a:pt x="6446027" y="2359722"/>
+                  </a:lnTo>
+                  <a:lnTo>
+                    <a:pt x="6374404" y="2350106"/>
+                  </a:lnTo>
+                  <a:lnTo>
+                    <a:pt x="6302782" y="2340299"/>
+                  </a:lnTo>
+                  <a:lnTo>
+                    <a:pt x="6231159" y="2330297"/>
+                  </a:lnTo>
+                  <a:lnTo>
+                    <a:pt x="6159537" y="2320097"/>
+                  </a:lnTo>
+                  <a:lnTo>
+                    <a:pt x="6087914" y="2309693"/>
+                  </a:lnTo>
+                  <a:lnTo>
+                    <a:pt x="6016292" y="2299083"/>
+                  </a:lnTo>
+                  <a:lnTo>
+                    <a:pt x="5944669" y="2288262"/>
+                  </a:lnTo>
+                  <a:lnTo>
+                    <a:pt x="5873047" y="2277226"/>
+                  </a:lnTo>
+                  <a:lnTo>
+                    <a:pt x="5801424" y="2265971"/>
+                  </a:lnTo>
+                  <a:lnTo>
+                    <a:pt x="5729802" y="2254492"/>
+                  </a:lnTo>
+                  <a:lnTo>
+                    <a:pt x="5658179" y="2242785"/>
+                  </a:lnTo>
+                  <a:lnTo>
+                    <a:pt x="5586557" y="2230845"/>
+                  </a:lnTo>
+                  <a:lnTo>
+                    <a:pt x="5514934" y="2218668"/>
+                  </a:lnTo>
+                  <a:lnTo>
+                    <a:pt x="5443311" y="2206249"/>
+                  </a:lnTo>
+                  <a:lnTo>
+                    <a:pt x="5371689" y="2193584"/>
+                  </a:lnTo>
+                  <a:lnTo>
+                    <a:pt x="5300066" y="2180666"/>
+                  </a:lnTo>
+                  <a:lnTo>
+                    <a:pt x="5228444" y="2167492"/>
+                  </a:lnTo>
+                  <a:lnTo>
+                    <a:pt x="5156821" y="2154056"/>
+                  </a:lnTo>
+                  <a:lnTo>
+                    <a:pt x="5085199" y="2140353"/>
+                  </a:lnTo>
+                  <a:lnTo>
+                    <a:pt x="5013576" y="2126378"/>
+                  </a:lnTo>
+                  <a:lnTo>
+                    <a:pt x="4941954" y="2112125"/>
+                  </a:lnTo>
+                  <a:lnTo>
+                    <a:pt x="4870331" y="2097588"/>
+                  </a:lnTo>
+                  <a:lnTo>
+                    <a:pt x="4798709" y="2082763"/>
+                  </a:lnTo>
+                  <a:lnTo>
+                    <a:pt x="4727086" y="2067643"/>
+                  </a:lnTo>
+                  <a:lnTo>
+                    <a:pt x="4655464" y="2052223"/>
+                  </a:lnTo>
+                  <a:lnTo>
+                    <a:pt x="4583841" y="2036496"/>
+                  </a:lnTo>
+                  <a:lnTo>
+                    <a:pt x="4512219" y="2020457"/>
+                  </a:lnTo>
+                  <a:lnTo>
+                    <a:pt x="4440596" y="2018355"/>
+                  </a:lnTo>
+                  <a:lnTo>
+                    <a:pt x="4368974" y="2025219"/>
+                  </a:lnTo>
+                  <a:lnTo>
+                    <a:pt x="4297351" y="2032025"/>
+                  </a:lnTo>
+                  <a:lnTo>
+                    <a:pt x="4225729" y="2038775"/>
+                  </a:lnTo>
+                  <a:lnTo>
+                    <a:pt x="4154106" y="2045469"/>
+                  </a:lnTo>
+                  <a:lnTo>
+                    <a:pt x="4082483" y="2052107"/>
+                  </a:lnTo>
+                  <a:lnTo>
+                    <a:pt x="4010861" y="2058690"/>
+                  </a:lnTo>
+                  <a:lnTo>
+                    <a:pt x="3939238" y="2065218"/>
+                  </a:lnTo>
+                  <a:lnTo>
+                    <a:pt x="3867616" y="2071691"/>
+                  </a:lnTo>
+                  <a:lnTo>
+                    <a:pt x="3795993" y="2078111"/>
+                  </a:lnTo>
+                  <a:lnTo>
+                    <a:pt x="3724371" y="2084478"/>
+                  </a:lnTo>
+                  <a:lnTo>
+                    <a:pt x="3652748" y="2090792"/>
+                  </a:lnTo>
+                  <a:lnTo>
+                    <a:pt x="3581126" y="2097053"/>
+                  </a:lnTo>
+                  <a:lnTo>
+                    <a:pt x="3509503" y="2103262"/>
+                  </a:lnTo>
+                  <a:lnTo>
+                    <a:pt x="3437881" y="2109419"/>
+                  </a:lnTo>
+                  <a:lnTo>
+                    <a:pt x="3366258" y="2115525"/>
+                  </a:lnTo>
+                  <a:lnTo>
+                    <a:pt x="3294636" y="2121581"/>
+                  </a:lnTo>
+                  <a:lnTo>
+                    <a:pt x="3223013" y="2127586"/>
+                  </a:lnTo>
+                  <a:lnTo>
+                    <a:pt x="3151391" y="2133541"/>
+                  </a:lnTo>
+                  <a:lnTo>
+                    <a:pt x="3079768" y="2139446"/>
+                  </a:lnTo>
+                  <a:lnTo>
+                    <a:pt x="3008146" y="2145303"/>
+                  </a:lnTo>
+                  <a:lnTo>
+                    <a:pt x="2936523" y="2151110"/>
+                  </a:lnTo>
+                  <a:lnTo>
+                    <a:pt x="2864901" y="2156870"/>
+                  </a:lnTo>
+                  <a:lnTo>
+                    <a:pt x="2793278" y="2162581"/>
+                  </a:lnTo>
+                  <a:lnTo>
+                    <a:pt x="2721655" y="2168245"/>
+                  </a:lnTo>
+                  <a:lnTo>
+                    <a:pt x="2650033" y="2173862"/>
+                  </a:lnTo>
+                  <a:lnTo>
+                    <a:pt x="2578410" y="2179432"/>
+                  </a:lnTo>
+                  <a:lnTo>
+                    <a:pt x="2506788" y="2184956"/>
+                  </a:lnTo>
+                  <a:lnTo>
+                    <a:pt x="2435165" y="2190434"/>
+                  </a:lnTo>
+                  <a:lnTo>
+                    <a:pt x="2363543" y="2195867"/>
+                  </a:lnTo>
+                  <a:lnTo>
+                    <a:pt x="2291920" y="2201254"/>
+                  </a:lnTo>
+                  <a:lnTo>
+                    <a:pt x="2220298" y="2206596"/>
+                  </a:lnTo>
+                  <a:lnTo>
+                    <a:pt x="2148675" y="2211894"/>
+                  </a:lnTo>
+                  <a:lnTo>
+                    <a:pt x="2077053" y="2217148"/>
+                  </a:lnTo>
+                  <a:lnTo>
+                    <a:pt x="2005430" y="2222358"/>
+                  </a:lnTo>
+                  <a:lnTo>
+                    <a:pt x="1933808" y="2227525"/>
+                  </a:lnTo>
+                  <a:lnTo>
+                    <a:pt x="1862185" y="2232649"/>
+                  </a:lnTo>
+                  <a:lnTo>
+                    <a:pt x="1790563" y="2237730"/>
+                  </a:lnTo>
+                  <a:lnTo>
+                    <a:pt x="1718940" y="2242769"/>
+                  </a:lnTo>
+                  <a:lnTo>
+                    <a:pt x="1647318" y="2247766"/>
+                  </a:lnTo>
+                  <a:lnTo>
+                    <a:pt x="1575695" y="2252722"/>
+                  </a:lnTo>
+                  <a:lnTo>
+                    <a:pt x="1504073" y="2257636"/>
+                  </a:lnTo>
+                  <a:lnTo>
+                    <a:pt x="1432450" y="2262510"/>
+                  </a:lnTo>
+                  <a:lnTo>
+                    <a:pt x="1360827" y="2267343"/>
+                  </a:lnTo>
+                  <a:lnTo>
+                    <a:pt x="1289205" y="2272135"/>
+                  </a:lnTo>
+                  <a:lnTo>
+                    <a:pt x="1217582" y="2276888"/>
+                  </a:lnTo>
+                  <a:lnTo>
+                    <a:pt x="1145960" y="2281601"/>
+                  </a:lnTo>
+                  <a:lnTo>
+                    <a:pt x="1074337" y="2286276"/>
+                  </a:lnTo>
+                  <a:lnTo>
+                    <a:pt x="1002715" y="2290911"/>
+                  </a:lnTo>
+                  <a:lnTo>
+                    <a:pt x="931092" y="2295507"/>
+                  </a:lnTo>
+                  <a:lnTo>
+                    <a:pt x="859470" y="2300066"/>
+                  </a:lnTo>
+                  <a:lnTo>
+                    <a:pt x="787847" y="2304586"/>
+                  </a:lnTo>
+                  <a:lnTo>
+                    <a:pt x="716225" y="2309069"/>
+                  </a:lnTo>
+                  <a:lnTo>
+                    <a:pt x="644602" y="2313515"/>
+                  </a:lnTo>
+                  <a:lnTo>
+                    <a:pt x="572980" y="2317924"/>
+                  </a:lnTo>
+                  <a:lnTo>
+                    <a:pt x="501357" y="2322296"/>
+                  </a:lnTo>
+                  <a:lnTo>
+                    <a:pt x="429735" y="2326632"/>
+                  </a:lnTo>
+                  <a:lnTo>
+                    <a:pt x="358112" y="2330931"/>
+                  </a:lnTo>
+                  <a:lnTo>
+                    <a:pt x="286490" y="2335195"/>
+                  </a:lnTo>
+                  <a:lnTo>
+                    <a:pt x="214867" y="2339423"/>
+                  </a:lnTo>
+                  <a:lnTo>
+                    <a:pt x="143245" y="2343617"/>
+                  </a:lnTo>
+                  <a:lnTo>
+                    <a:pt x="71622" y="2347775"/>
+                  </a:lnTo>
+                  <a:lnTo>
+                    <a:pt x="0" y="2351899"/>
                   </a:lnTo>
                   <a:close/>
                 </a:path>
@@ -3547,312 +3547,312 @@
           </p:nvSpPr>
           <p:spPr>
             <a:xfrm>
-              <a:off x="1172049" y="2822884"/>
-              <a:ext cx="7090630" cy="1899991"/>
+              <a:off x="1172049" y="2713653"/>
+              <a:ext cx="7090630" cy="2011434"/>
             </a:xfrm>
             <a:custGeom>
               <a:avLst/>
               <a:pathLst>
-                <a:path w="7090630" h="1899991">
+                <a:path w="7090630" h="2011434">
                   <a:moveTo>
                     <a:pt x="0" y="0"/>
                   </a:moveTo>
                   <a:lnTo>
-                    <a:pt x="71622" y="51826"/>
-                  </a:lnTo>
-                  <a:lnTo>
-                    <a:pt x="143245" y="102670"/>
-                  </a:lnTo>
-                  <a:lnTo>
-                    <a:pt x="214867" y="152551"/>
-                  </a:lnTo>
-                  <a:lnTo>
-                    <a:pt x="286490" y="201486"/>
-                  </a:lnTo>
-                  <a:lnTo>
-                    <a:pt x="358112" y="249494"/>
-                  </a:lnTo>
-                  <a:lnTo>
-                    <a:pt x="429735" y="296591"/>
-                  </a:lnTo>
-                  <a:lnTo>
-                    <a:pt x="501357" y="342796"/>
-                  </a:lnTo>
-                  <a:lnTo>
-                    <a:pt x="572980" y="388126"/>
-                  </a:lnTo>
-                  <a:lnTo>
-                    <a:pt x="644602" y="432596"/>
-                  </a:lnTo>
-                  <a:lnTo>
-                    <a:pt x="716225" y="476223"/>
-                  </a:lnTo>
-                  <a:lnTo>
-                    <a:pt x="787847" y="519023"/>
-                  </a:lnTo>
-                  <a:lnTo>
-                    <a:pt x="859470" y="561012"/>
-                  </a:lnTo>
-                  <a:lnTo>
-                    <a:pt x="931092" y="602205"/>
-                  </a:lnTo>
-                  <a:lnTo>
-                    <a:pt x="1002715" y="642618"/>
-                  </a:lnTo>
-                  <a:lnTo>
-                    <a:pt x="1074337" y="682264"/>
-                  </a:lnTo>
-                  <a:lnTo>
-                    <a:pt x="1145960" y="721159"/>
-                  </a:lnTo>
-                  <a:lnTo>
-                    <a:pt x="1217582" y="759317"/>
-                  </a:lnTo>
-                  <a:lnTo>
-                    <a:pt x="1289205" y="796752"/>
-                  </a:lnTo>
-                  <a:lnTo>
-                    <a:pt x="1360827" y="833477"/>
-                  </a:lnTo>
-                  <a:lnTo>
-                    <a:pt x="1432450" y="869506"/>
-                  </a:lnTo>
-                  <a:lnTo>
-                    <a:pt x="1504073" y="904852"/>
-                  </a:lnTo>
-                  <a:lnTo>
-                    <a:pt x="1575695" y="939528"/>
-                  </a:lnTo>
-                  <a:lnTo>
-                    <a:pt x="1647318" y="973547"/>
-                  </a:lnTo>
-                  <a:lnTo>
-                    <a:pt x="1718940" y="1006921"/>
-                  </a:lnTo>
-                  <a:lnTo>
-                    <a:pt x="1790563" y="1039663"/>
-                  </a:lnTo>
-                  <a:lnTo>
-                    <a:pt x="1862185" y="1071784"/>
-                  </a:lnTo>
-                  <a:lnTo>
-                    <a:pt x="1933808" y="1103296"/>
-                  </a:lnTo>
-                  <a:lnTo>
-                    <a:pt x="2005430" y="1134211"/>
-                  </a:lnTo>
-                  <a:lnTo>
-                    <a:pt x="2077053" y="1164540"/>
-                  </a:lnTo>
-                  <a:lnTo>
-                    <a:pt x="2148675" y="1194294"/>
-                  </a:lnTo>
-                  <a:lnTo>
-                    <a:pt x="2220298" y="1223484"/>
-                  </a:lnTo>
-                  <a:lnTo>
-                    <a:pt x="2291920" y="1252121"/>
-                  </a:lnTo>
-                  <a:lnTo>
-                    <a:pt x="2363543" y="1280215"/>
-                  </a:lnTo>
-                  <a:lnTo>
-                    <a:pt x="2435165" y="1307777"/>
-                  </a:lnTo>
-                  <a:lnTo>
-                    <a:pt x="2506788" y="1334816"/>
-                  </a:lnTo>
-                  <a:lnTo>
-                    <a:pt x="2578410" y="1361343"/>
-                  </a:lnTo>
-                  <a:lnTo>
-                    <a:pt x="2650033" y="1387367"/>
-                  </a:lnTo>
-                  <a:lnTo>
-                    <a:pt x="2721655" y="1412897"/>
-                  </a:lnTo>
-                  <a:lnTo>
-                    <a:pt x="2793278" y="1437944"/>
-                  </a:lnTo>
-                  <a:lnTo>
-                    <a:pt x="2864901" y="1462516"/>
-                  </a:lnTo>
-                  <a:lnTo>
-                    <a:pt x="2936523" y="1486623"/>
-                  </a:lnTo>
-                  <a:lnTo>
-                    <a:pt x="3008146" y="1510272"/>
-                  </a:lnTo>
-                  <a:lnTo>
-                    <a:pt x="3079768" y="1533473"/>
-                  </a:lnTo>
-                  <a:lnTo>
-                    <a:pt x="3151391" y="1556235"/>
-                  </a:lnTo>
-                  <a:lnTo>
-                    <a:pt x="3223013" y="1578565"/>
-                  </a:lnTo>
-                  <a:lnTo>
-                    <a:pt x="3294636" y="1600471"/>
-                  </a:lnTo>
-                  <a:lnTo>
-                    <a:pt x="3366258" y="1621963"/>
-                  </a:lnTo>
-                  <a:lnTo>
-                    <a:pt x="3437881" y="1643047"/>
-                  </a:lnTo>
-                  <a:lnTo>
-                    <a:pt x="3509503" y="1663732"/>
-                  </a:lnTo>
-                  <a:lnTo>
-                    <a:pt x="3581126" y="1684024"/>
-                  </a:lnTo>
-                  <a:lnTo>
-                    <a:pt x="3652748" y="1703932"/>
-                  </a:lnTo>
-                  <a:lnTo>
-                    <a:pt x="3724371" y="1723463"/>
-                  </a:lnTo>
-                  <a:lnTo>
-                    <a:pt x="3795993" y="1742623"/>
-                  </a:lnTo>
-                  <a:lnTo>
-                    <a:pt x="3867616" y="1761420"/>
-                  </a:lnTo>
-                  <a:lnTo>
-                    <a:pt x="3939238" y="1779861"/>
-                  </a:lnTo>
-                  <a:lnTo>
-                    <a:pt x="4010861" y="1797953"/>
-                  </a:lnTo>
-                  <a:lnTo>
-                    <a:pt x="4082483" y="1815701"/>
-                  </a:lnTo>
-                  <a:lnTo>
-                    <a:pt x="4154106" y="1833114"/>
-                  </a:lnTo>
-                  <a:lnTo>
-                    <a:pt x="4225729" y="1850196"/>
-                  </a:lnTo>
-                  <a:lnTo>
-                    <a:pt x="4297351" y="1866954"/>
-                  </a:lnTo>
-                  <a:lnTo>
-                    <a:pt x="4368974" y="1883395"/>
-                  </a:lnTo>
-                  <a:lnTo>
-                    <a:pt x="4440596" y="1899524"/>
-                  </a:lnTo>
-                  <a:lnTo>
-                    <a:pt x="4512219" y="1899991"/>
-                  </a:lnTo>
-                  <a:lnTo>
-                    <a:pt x="4583841" y="1892522"/>
-                  </a:lnTo>
-                  <a:lnTo>
-                    <a:pt x="4655464" y="1884986"/>
-                  </a:lnTo>
-                  <a:lnTo>
-                    <a:pt x="4727086" y="1877383"/>
-                  </a:lnTo>
-                  <a:lnTo>
-                    <a:pt x="4798709" y="1869711"/>
-                  </a:lnTo>
-                  <a:lnTo>
-                    <a:pt x="4870331" y="1861971"/>
-                  </a:lnTo>
-                  <a:lnTo>
-                    <a:pt x="4941954" y="1854162"/>
-                  </a:lnTo>
-                  <a:lnTo>
-                    <a:pt x="5013576" y="1846283"/>
-                  </a:lnTo>
-                  <a:lnTo>
-                    <a:pt x="5085199" y="1838333"/>
-                  </a:lnTo>
-                  <a:lnTo>
-                    <a:pt x="5156821" y="1830312"/>
-                  </a:lnTo>
-                  <a:lnTo>
-                    <a:pt x="5228444" y="1822220"/>
-                  </a:lnTo>
-                  <a:lnTo>
-                    <a:pt x="5300066" y="1814055"/>
-                  </a:lnTo>
-                  <a:lnTo>
-                    <a:pt x="5371689" y="1805817"/>
-                  </a:lnTo>
-                  <a:lnTo>
-                    <a:pt x="5443311" y="1797505"/>
-                  </a:lnTo>
-                  <a:lnTo>
-                    <a:pt x="5514934" y="1789118"/>
-                  </a:lnTo>
-                  <a:lnTo>
-                    <a:pt x="5586557" y="1780657"/>
-                  </a:lnTo>
-                  <a:lnTo>
-                    <a:pt x="5658179" y="1772120"/>
-                  </a:lnTo>
-                  <a:lnTo>
-                    <a:pt x="5729802" y="1763506"/>
-                  </a:lnTo>
-                  <a:lnTo>
-                    <a:pt x="5801424" y="1754816"/>
-                  </a:lnTo>
-                  <a:lnTo>
-                    <a:pt x="5873047" y="1746047"/>
-                  </a:lnTo>
-                  <a:lnTo>
-                    <a:pt x="5944669" y="1737200"/>
-                  </a:lnTo>
-                  <a:lnTo>
-                    <a:pt x="6016292" y="1728274"/>
-                  </a:lnTo>
-                  <a:lnTo>
-                    <a:pt x="6087914" y="1719268"/>
-                  </a:lnTo>
-                  <a:lnTo>
-                    <a:pt x="6159537" y="1710181"/>
-                  </a:lnTo>
-                  <a:lnTo>
-                    <a:pt x="6231159" y="1701013"/>
-                  </a:lnTo>
-                  <a:lnTo>
-                    <a:pt x="6302782" y="1691763"/>
-                  </a:lnTo>
-                  <a:lnTo>
-                    <a:pt x="6374404" y="1682430"/>
-                  </a:lnTo>
-                  <a:lnTo>
-                    <a:pt x="6446027" y="1673014"/>
-                  </a:lnTo>
-                  <a:lnTo>
-                    <a:pt x="6517649" y="1663513"/>
-                  </a:lnTo>
-                  <a:lnTo>
-                    <a:pt x="6589272" y="1653927"/>
-                  </a:lnTo>
-                  <a:lnTo>
-                    <a:pt x="6660894" y="1644256"/>
-                  </a:lnTo>
-                  <a:lnTo>
-                    <a:pt x="6732517" y="1634498"/>
-                  </a:lnTo>
-                  <a:lnTo>
-                    <a:pt x="6804139" y="1624652"/>
-                  </a:lnTo>
-                  <a:lnTo>
-                    <a:pt x="6875762" y="1614719"/>
-                  </a:lnTo>
-                  <a:lnTo>
-                    <a:pt x="6947385" y="1604696"/>
-                  </a:lnTo>
-                  <a:lnTo>
-                    <a:pt x="7019007" y="1594584"/>
-                  </a:lnTo>
-                  <a:lnTo>
-                    <a:pt x="7090630" y="1584381"/>
+                    <a:pt x="71622" y="55408"/>
+                  </a:lnTo>
+                  <a:lnTo>
+                    <a:pt x="143245" y="109737"/>
+                  </a:lnTo>
+                  <a:lnTo>
+                    <a:pt x="214867" y="163008"/>
+                  </a:lnTo>
+                  <a:lnTo>
+                    <a:pt x="286490" y="215240"/>
+                  </a:lnTo>
+                  <a:lnTo>
+                    <a:pt x="358112" y="266455"/>
+                  </a:lnTo>
+                  <a:lnTo>
+                    <a:pt x="429735" y="316671"/>
+                  </a:lnTo>
+                  <a:lnTo>
+                    <a:pt x="501357" y="365910"/>
+                  </a:lnTo>
+                  <a:lnTo>
+                    <a:pt x="572980" y="414188"/>
+                  </a:lnTo>
+                  <a:lnTo>
+                    <a:pt x="644602" y="461527"/>
+                  </a:lnTo>
+                  <a:lnTo>
+                    <a:pt x="716225" y="507942"/>
+                  </a:lnTo>
+                  <a:lnTo>
+                    <a:pt x="787847" y="553453"/>
+                  </a:lnTo>
+                  <a:lnTo>
+                    <a:pt x="859470" y="598078"/>
+                  </a:lnTo>
+                  <a:lnTo>
+                    <a:pt x="931092" y="641833"/>
+                  </a:lnTo>
+                  <a:lnTo>
+                    <a:pt x="1002715" y="684735"/>
+                  </a:lnTo>
+                  <a:lnTo>
+                    <a:pt x="1074337" y="726801"/>
+                  </a:lnTo>
+                  <a:lnTo>
+                    <a:pt x="1145960" y="768048"/>
+                  </a:lnTo>
+                  <a:lnTo>
+                    <a:pt x="1217582" y="808491"/>
+                  </a:lnTo>
+                  <a:lnTo>
+                    <a:pt x="1289205" y="848146"/>
+                  </a:lnTo>
+                  <a:lnTo>
+                    <a:pt x="1360827" y="887028"/>
+                  </a:lnTo>
+                  <a:lnTo>
+                    <a:pt x="1432450" y="925153"/>
+                  </a:lnTo>
+                  <a:lnTo>
+                    <a:pt x="1504073" y="962534"/>
+                  </a:lnTo>
+                  <a:lnTo>
+                    <a:pt x="1575695" y="999188"/>
+                  </a:lnTo>
+                  <a:lnTo>
+                    <a:pt x="1647318" y="1035127"/>
+                  </a:lnTo>
+                  <a:lnTo>
+                    <a:pt x="1718940" y="1070366"/>
+                  </a:lnTo>
+                  <a:lnTo>
+                    <a:pt x="1790563" y="1104918"/>
+                  </a:lnTo>
+                  <a:lnTo>
+                    <a:pt x="1862185" y="1138797"/>
+                  </a:lnTo>
+                  <a:lnTo>
+                    <a:pt x="1933808" y="1172015"/>
+                  </a:lnTo>
+                  <a:lnTo>
+                    <a:pt x="2005430" y="1204587"/>
+                  </a:lnTo>
+                  <a:lnTo>
+                    <a:pt x="2077053" y="1236524"/>
+                  </a:lnTo>
+                  <a:lnTo>
+                    <a:pt x="2148675" y="1267838"/>
+                  </a:lnTo>
+                  <a:lnTo>
+                    <a:pt x="2220298" y="1298543"/>
+                  </a:lnTo>
+                  <a:lnTo>
+                    <a:pt x="2291920" y="1328649"/>
+                  </a:lnTo>
+                  <a:lnTo>
+                    <a:pt x="2363543" y="1358168"/>
+                  </a:lnTo>
+                  <a:lnTo>
+                    <a:pt x="2435165" y="1387112"/>
+                  </a:lnTo>
+                  <a:lnTo>
+                    <a:pt x="2506788" y="1415492"/>
+                  </a:lnTo>
+                  <a:lnTo>
+                    <a:pt x="2578410" y="1443320"/>
+                  </a:lnTo>
+                  <a:lnTo>
+                    <a:pt x="2650033" y="1470605"/>
+                  </a:lnTo>
+                  <a:lnTo>
+                    <a:pt x="2721655" y="1497358"/>
+                  </a:lnTo>
+                  <a:lnTo>
+                    <a:pt x="2793278" y="1523590"/>
+                  </a:lnTo>
+                  <a:lnTo>
+                    <a:pt x="2864901" y="1549311"/>
+                  </a:lnTo>
+                  <a:lnTo>
+                    <a:pt x="2936523" y="1574531"/>
+                  </a:lnTo>
+                  <a:lnTo>
+                    <a:pt x="3008146" y="1599259"/>
+                  </a:lnTo>
+                  <a:lnTo>
+                    <a:pt x="3079768" y="1623505"/>
+                  </a:lnTo>
+                  <a:lnTo>
+                    <a:pt x="3151391" y="1647279"/>
+                  </a:lnTo>
+                  <a:lnTo>
+                    <a:pt x="3223013" y="1670590"/>
+                  </a:lnTo>
+                  <a:lnTo>
+                    <a:pt x="3294636" y="1693447"/>
+                  </a:lnTo>
+                  <a:lnTo>
+                    <a:pt x="3366258" y="1715858"/>
+                  </a:lnTo>
+                  <a:lnTo>
+                    <a:pt x="3437881" y="1737832"/>
+                  </a:lnTo>
+                  <a:lnTo>
+                    <a:pt x="3509503" y="1759379"/>
+                  </a:lnTo>
+                  <a:lnTo>
+                    <a:pt x="3581126" y="1780505"/>
+                  </a:lnTo>
+                  <a:lnTo>
+                    <a:pt x="3652748" y="1801220"/>
+                  </a:lnTo>
+                  <a:lnTo>
+                    <a:pt x="3724371" y="1821531"/>
+                  </a:lnTo>
+                  <a:lnTo>
+                    <a:pt x="3795993" y="1841446"/>
+                  </a:lnTo>
+                  <a:lnTo>
+                    <a:pt x="3867616" y="1860974"/>
+                  </a:lnTo>
+                  <a:lnTo>
+                    <a:pt x="3939238" y="1880120"/>
+                  </a:lnTo>
+                  <a:lnTo>
+                    <a:pt x="4010861" y="1898894"/>
+                  </a:lnTo>
+                  <a:lnTo>
+                    <a:pt x="4082483" y="1917302"/>
+                  </a:lnTo>
+                  <a:lnTo>
+                    <a:pt x="4154106" y="1935351"/>
+                  </a:lnTo>
+                  <a:lnTo>
+                    <a:pt x="4225729" y="1953049"/>
+                  </a:lnTo>
+                  <a:lnTo>
+                    <a:pt x="4297351" y="1970402"/>
+                  </a:lnTo>
+                  <a:lnTo>
+                    <a:pt x="4368974" y="1987416"/>
+                  </a:lnTo>
+                  <a:lnTo>
+                    <a:pt x="4440596" y="2004099"/>
+                  </a:lnTo>
+                  <a:lnTo>
+                    <a:pt x="4512219" y="2011434"/>
+                  </a:lnTo>
+                  <a:lnTo>
+                    <a:pt x="4583841" y="2004455"/>
+                  </a:lnTo>
+                  <a:lnTo>
+                    <a:pt x="4655464" y="1997417"/>
+                  </a:lnTo>
+                  <a:lnTo>
+                    <a:pt x="4727086" y="1990320"/>
+                  </a:lnTo>
+                  <a:lnTo>
+                    <a:pt x="4798709" y="1983164"/>
+                  </a:lnTo>
+                  <a:lnTo>
+                    <a:pt x="4870331" y="1975948"/>
+                  </a:lnTo>
+                  <a:lnTo>
+                    <a:pt x="4941954" y="1968671"/>
+                  </a:lnTo>
+                  <a:lnTo>
+                    <a:pt x="5013576" y="1961333"/>
+                  </a:lnTo>
+                  <a:lnTo>
+                    <a:pt x="5085199" y="1953934"/>
+                  </a:lnTo>
+                  <a:lnTo>
+                    <a:pt x="5156821" y="1946473"/>
+                  </a:lnTo>
+                  <a:lnTo>
+                    <a:pt x="5228444" y="1938949"/>
+                  </a:lnTo>
+                  <a:lnTo>
+                    <a:pt x="5300066" y="1931362"/>
+                  </a:lnTo>
+                  <a:lnTo>
+                    <a:pt x="5371689" y="1923711"/>
+                  </a:lnTo>
+                  <a:lnTo>
+                    <a:pt x="5443311" y="1915996"/>
+                  </a:lnTo>
+                  <a:lnTo>
+                    <a:pt x="5514934" y="1908216"/>
+                  </a:lnTo>
+                  <a:lnTo>
+                    <a:pt x="5586557" y="1900372"/>
+                  </a:lnTo>
+                  <a:lnTo>
+                    <a:pt x="5658179" y="1892461"/>
+                  </a:lnTo>
+                  <a:lnTo>
+                    <a:pt x="5729802" y="1884484"/>
+                  </a:lnTo>
+                  <a:lnTo>
+                    <a:pt x="5801424" y="1876440"/>
+                  </a:lnTo>
+                  <a:lnTo>
+                    <a:pt x="5873047" y="1868329"/>
+                  </a:lnTo>
+                  <a:lnTo>
+                    <a:pt x="5944669" y="1860150"/>
+                  </a:lnTo>
+                  <a:lnTo>
+                    <a:pt x="6016292" y="1851902"/>
+                  </a:lnTo>
+                  <a:lnTo>
+                    <a:pt x="6087914" y="1843584"/>
+                  </a:lnTo>
+                  <a:lnTo>
+                    <a:pt x="6159537" y="1835198"/>
+                  </a:lnTo>
+                  <a:lnTo>
+                    <a:pt x="6231159" y="1826740"/>
+                  </a:lnTo>
+                  <a:lnTo>
+                    <a:pt x="6302782" y="1818212"/>
+                  </a:lnTo>
+                  <a:lnTo>
+                    <a:pt x="6374404" y="1809613"/>
+                  </a:lnTo>
+                  <a:lnTo>
+                    <a:pt x="6446027" y="1800941"/>
+                  </a:lnTo>
+                  <a:lnTo>
+                    <a:pt x="6517649" y="1792196"/>
+                  </a:lnTo>
+                  <a:lnTo>
+                    <a:pt x="6589272" y="1783378"/>
+                  </a:lnTo>
+                  <a:lnTo>
+                    <a:pt x="6660894" y="1774487"/>
+                  </a:lnTo>
+                  <a:lnTo>
+                    <a:pt x="6732517" y="1765520"/>
+                  </a:lnTo>
+                  <a:lnTo>
+                    <a:pt x="6804139" y="1756479"/>
+                  </a:lnTo>
+                  <a:lnTo>
+                    <a:pt x="6875762" y="1747361"/>
+                  </a:lnTo>
+                  <a:lnTo>
+                    <a:pt x="6947385" y="1738167"/>
+                  </a:lnTo>
+                  <a:lnTo>
+                    <a:pt x="7019007" y="1728896"/>
+                  </a:lnTo>
+                  <a:lnTo>
+                    <a:pt x="7090630" y="1719548"/>
                   </a:lnTo>
                 </a:path>
               </a:pathLst>
@@ -3872,312 +3872,312 @@
           </p:nvSpPr>
           <p:spPr>
             <a:xfrm>
-              <a:off x="1172049" y="4730278"/>
-              <a:ext cx="7090630" cy="415713"/>
+              <a:off x="1172049" y="4732008"/>
+              <a:ext cx="7090630" cy="419901"/>
             </a:xfrm>
             <a:custGeom>
               <a:avLst/>
               <a:pathLst>
-                <a:path w="7090630" h="415713">
+                <a:path w="7090630" h="419901">
                   <a:moveTo>
-                    <a:pt x="7090630" y="415713"/>
+                    <a:pt x="7090630" y="419901"/>
                   </a:moveTo>
                   <a:lnTo>
-                    <a:pt x="7019007" y="407768"/>
-                  </a:lnTo>
-                  <a:lnTo>
-                    <a:pt x="6947385" y="399669"/>
-                  </a:lnTo>
-                  <a:lnTo>
-                    <a:pt x="6875762" y="391413"/>
-                  </a:lnTo>
-                  <a:lnTo>
-                    <a:pt x="6804139" y="382998"/>
-                  </a:lnTo>
-                  <a:lnTo>
-                    <a:pt x="6732517" y="374421"/>
-                  </a:lnTo>
-                  <a:lnTo>
-                    <a:pt x="6660894" y="365677"/>
-                  </a:lnTo>
-                  <a:lnTo>
-                    <a:pt x="6589272" y="356765"/>
-                  </a:lnTo>
-                  <a:lnTo>
-                    <a:pt x="6517649" y="347681"/>
-                  </a:lnTo>
-                  <a:lnTo>
-                    <a:pt x="6446027" y="338421"/>
-                  </a:lnTo>
-                  <a:lnTo>
-                    <a:pt x="6374404" y="328982"/>
-                  </a:lnTo>
-                  <a:lnTo>
-                    <a:pt x="6302782" y="319361"/>
-                  </a:lnTo>
-                  <a:lnTo>
-                    <a:pt x="6231159" y="309554"/>
-                  </a:lnTo>
-                  <a:lnTo>
-                    <a:pt x="6159537" y="299558"/>
-                  </a:lnTo>
-                  <a:lnTo>
-                    <a:pt x="6087914" y="289368"/>
-                  </a:lnTo>
-                  <a:lnTo>
-                    <a:pt x="6016292" y="278982"/>
-                  </a:lnTo>
-                  <a:lnTo>
-                    <a:pt x="5944669" y="268394"/>
-                  </a:lnTo>
-                  <a:lnTo>
-                    <a:pt x="5873047" y="257603"/>
-                  </a:lnTo>
-                  <a:lnTo>
-                    <a:pt x="5801424" y="246603"/>
-                  </a:lnTo>
-                  <a:lnTo>
-                    <a:pt x="5729802" y="235390"/>
-                  </a:lnTo>
-                  <a:lnTo>
-                    <a:pt x="5658179" y="223961"/>
-                  </a:lnTo>
-                  <a:lnTo>
-                    <a:pt x="5586557" y="212310"/>
-                  </a:lnTo>
-                  <a:lnTo>
-                    <a:pt x="5514934" y="200435"/>
-                  </a:lnTo>
-                  <a:lnTo>
-                    <a:pt x="5443311" y="188331"/>
-                  </a:lnTo>
-                  <a:lnTo>
-                    <a:pt x="5371689" y="175992"/>
-                  </a:lnTo>
-                  <a:lnTo>
-                    <a:pt x="5300066" y="163415"/>
-                  </a:lnTo>
-                  <a:lnTo>
-                    <a:pt x="5228444" y="150595"/>
-                  </a:lnTo>
-                  <a:lnTo>
-                    <a:pt x="5156821" y="137528"/>
-                  </a:lnTo>
-                  <a:lnTo>
-                    <a:pt x="5085199" y="124208"/>
-                  </a:lnTo>
-                  <a:lnTo>
-                    <a:pt x="5013576" y="110630"/>
-                  </a:lnTo>
-                  <a:lnTo>
-                    <a:pt x="4941954" y="96791"/>
-                  </a:lnTo>
-                  <a:lnTo>
-                    <a:pt x="4870331" y="82684"/>
-                  </a:lnTo>
-                  <a:lnTo>
-                    <a:pt x="4798709" y="68304"/>
-                  </a:lnTo>
-                  <a:lnTo>
-                    <a:pt x="4727086" y="53647"/>
-                  </a:lnTo>
-                  <a:lnTo>
-                    <a:pt x="4655464" y="38706"/>
-                  </a:lnTo>
-                  <a:lnTo>
-                    <a:pt x="4583841" y="23477"/>
-                  </a:lnTo>
-                  <a:lnTo>
-                    <a:pt x="4512219" y="7953"/>
+                    <a:pt x="7019007" y="411846"/>
+                  </a:lnTo>
+                  <a:lnTo>
+                    <a:pt x="6947385" y="403631"/>
+                  </a:lnTo>
+                  <a:lnTo>
+                    <a:pt x="6875762" y="395252"/>
+                  </a:lnTo>
+                  <a:lnTo>
+                    <a:pt x="6804139" y="386707"/>
+                  </a:lnTo>
+                  <a:lnTo>
+                    <a:pt x="6732517" y="377992"/>
+                  </a:lnTo>
+                  <a:lnTo>
+                    <a:pt x="6660894" y="369104"/>
+                  </a:lnTo>
+                  <a:lnTo>
+                    <a:pt x="6589272" y="360040"/>
+                  </a:lnTo>
+                  <a:lnTo>
+                    <a:pt x="6517649" y="350795"/>
+                  </a:lnTo>
+                  <a:lnTo>
+                    <a:pt x="6446027" y="341366"/>
+                  </a:lnTo>
+                  <a:lnTo>
+                    <a:pt x="6374404" y="331751"/>
+                  </a:lnTo>
+                  <a:lnTo>
+                    <a:pt x="6302782" y="321944"/>
+                  </a:lnTo>
+                  <a:lnTo>
+                    <a:pt x="6231159" y="311942"/>
+                  </a:lnTo>
+                  <a:lnTo>
+                    <a:pt x="6159537" y="301741"/>
+                  </a:lnTo>
+                  <a:lnTo>
+                    <a:pt x="6087914" y="291338"/>
+                  </a:lnTo>
+                  <a:lnTo>
+                    <a:pt x="6016292" y="280728"/>
+                  </a:lnTo>
+                  <a:lnTo>
+                    <a:pt x="5944669" y="269907"/>
+                  </a:lnTo>
+                  <a:lnTo>
+                    <a:pt x="5873047" y="258871"/>
+                  </a:lnTo>
+                  <a:lnTo>
+                    <a:pt x="5801424" y="247616"/>
+                  </a:lnTo>
+                  <a:lnTo>
+                    <a:pt x="5729802" y="236137"/>
+                  </a:lnTo>
+                  <a:lnTo>
+                    <a:pt x="5658179" y="224429"/>
+                  </a:lnTo>
+                  <a:lnTo>
+                    <a:pt x="5586557" y="212490"/>
+                  </a:lnTo>
+                  <a:lnTo>
+                    <a:pt x="5514934" y="200313"/>
+                  </a:lnTo>
+                  <a:lnTo>
+                    <a:pt x="5443311" y="187894"/>
+                  </a:lnTo>
+                  <a:lnTo>
+                    <a:pt x="5371689" y="175228"/>
+                  </a:lnTo>
+                  <a:lnTo>
+                    <a:pt x="5300066" y="162311"/>
+                  </a:lnTo>
+                  <a:lnTo>
+                    <a:pt x="5228444" y="149136"/>
+                  </a:lnTo>
+                  <a:lnTo>
+                    <a:pt x="5156821" y="135700"/>
+                  </a:lnTo>
+                  <a:lnTo>
+                    <a:pt x="5085199" y="121997"/>
+                  </a:lnTo>
+                  <a:lnTo>
+                    <a:pt x="5013576" y="108022"/>
+                  </a:lnTo>
+                  <a:lnTo>
+                    <a:pt x="4941954" y="93769"/>
+                  </a:lnTo>
+                  <a:lnTo>
+                    <a:pt x="4870331" y="79233"/>
+                  </a:lnTo>
+                  <a:lnTo>
+                    <a:pt x="4798709" y="64408"/>
+                  </a:lnTo>
+                  <a:lnTo>
+                    <a:pt x="4727086" y="49288"/>
+                  </a:lnTo>
+                  <a:lnTo>
+                    <a:pt x="4655464" y="33868"/>
+                  </a:lnTo>
+                  <a:lnTo>
+                    <a:pt x="4583841" y="18141"/>
+                  </a:lnTo>
+                  <a:lnTo>
+                    <a:pt x="4512219" y="2102"/>
                   </a:lnTo>
                   <a:lnTo>
                     <a:pt x="4440596" y="0"/>
                   </a:lnTo>
                   <a:lnTo>
-                    <a:pt x="4368974" y="7336"/>
-                  </a:lnTo>
-                  <a:lnTo>
-                    <a:pt x="4297351" y="14608"/>
-                  </a:lnTo>
-                  <a:lnTo>
-                    <a:pt x="4225729" y="21816"/>
-                  </a:lnTo>
-                  <a:lnTo>
-                    <a:pt x="4154106" y="28959"/>
-                  </a:lnTo>
-                  <a:lnTo>
-                    <a:pt x="4082483" y="36039"/>
-                  </a:lnTo>
-                  <a:lnTo>
-                    <a:pt x="4010861" y="43056"/>
-                  </a:lnTo>
-                  <a:lnTo>
-                    <a:pt x="3939238" y="50011"/>
-                  </a:lnTo>
-                  <a:lnTo>
-                    <a:pt x="3867616" y="56905"/>
-                  </a:lnTo>
-                  <a:lnTo>
-                    <a:pt x="3795993" y="63737"/>
-                  </a:lnTo>
-                  <a:lnTo>
-                    <a:pt x="3724371" y="70508"/>
-                  </a:lnTo>
-                  <a:lnTo>
-                    <a:pt x="3652748" y="77220"/>
-                  </a:lnTo>
-                  <a:lnTo>
-                    <a:pt x="3581126" y="83872"/>
-                  </a:lnTo>
-                  <a:lnTo>
-                    <a:pt x="3509503" y="90464"/>
-                  </a:lnTo>
-                  <a:lnTo>
-                    <a:pt x="3437881" y="96999"/>
-                  </a:lnTo>
-                  <a:lnTo>
-                    <a:pt x="3366258" y="103475"/>
-                  </a:lnTo>
-                  <a:lnTo>
-                    <a:pt x="3294636" y="109894"/>
-                  </a:lnTo>
-                  <a:lnTo>
-                    <a:pt x="3223013" y="116256"/>
-                  </a:lnTo>
-                  <a:lnTo>
-                    <a:pt x="3151391" y="122562"/>
-                  </a:lnTo>
-                  <a:lnTo>
-                    <a:pt x="3079768" y="128811"/>
-                  </a:lnTo>
-                  <a:lnTo>
-                    <a:pt x="3008146" y="135005"/>
-                  </a:lnTo>
-                  <a:lnTo>
-                    <a:pt x="2936523" y="141145"/>
-                  </a:lnTo>
-                  <a:lnTo>
-                    <a:pt x="2864901" y="147229"/>
-                  </a:lnTo>
-                  <a:lnTo>
-                    <a:pt x="2793278" y="153260"/>
-                  </a:lnTo>
-                  <a:lnTo>
-                    <a:pt x="2721655" y="159237"/>
-                  </a:lnTo>
-                  <a:lnTo>
-                    <a:pt x="2650033" y="165161"/>
-                  </a:lnTo>
-                  <a:lnTo>
-                    <a:pt x="2578410" y="171033"/>
-                  </a:lnTo>
-                  <a:lnTo>
-                    <a:pt x="2506788" y="176853"/>
-                  </a:lnTo>
-                  <a:lnTo>
-                    <a:pt x="2435165" y="182621"/>
-                  </a:lnTo>
-                  <a:lnTo>
-                    <a:pt x="2363543" y="188337"/>
-                  </a:lnTo>
-                  <a:lnTo>
-                    <a:pt x="2291920" y="194003"/>
-                  </a:lnTo>
-                  <a:lnTo>
-                    <a:pt x="2220298" y="199619"/>
-                  </a:lnTo>
-                  <a:lnTo>
-                    <a:pt x="2148675" y="205185"/>
-                  </a:lnTo>
-                  <a:lnTo>
-                    <a:pt x="2077053" y="210702"/>
-                  </a:lnTo>
-                  <a:lnTo>
-                    <a:pt x="2005430" y="216169"/>
-                  </a:lnTo>
-                  <a:lnTo>
-                    <a:pt x="1933808" y="221588"/>
-                  </a:lnTo>
-                  <a:lnTo>
-                    <a:pt x="1862185" y="226959"/>
-                  </a:lnTo>
-                  <a:lnTo>
-                    <a:pt x="1790563" y="232283"/>
-                  </a:lnTo>
-                  <a:lnTo>
-                    <a:pt x="1718940" y="237559"/>
-                  </a:lnTo>
-                  <a:lnTo>
-                    <a:pt x="1647318" y="242788"/>
-                  </a:lnTo>
-                  <a:lnTo>
-                    <a:pt x="1575695" y="247971"/>
-                  </a:lnTo>
-                  <a:lnTo>
-                    <a:pt x="1504073" y="253108"/>
-                  </a:lnTo>
-                  <a:lnTo>
-                    <a:pt x="1432450" y="258199"/>
-                  </a:lnTo>
-                  <a:lnTo>
-                    <a:pt x="1360827" y="263246"/>
-                  </a:lnTo>
-                  <a:lnTo>
-                    <a:pt x="1289205" y="268247"/>
-                  </a:lnTo>
-                  <a:lnTo>
-                    <a:pt x="1217582" y="273204"/>
-                  </a:lnTo>
-                  <a:lnTo>
-                    <a:pt x="1145960" y="278117"/>
-                  </a:lnTo>
-                  <a:lnTo>
-                    <a:pt x="1074337" y="282987"/>
-                  </a:lnTo>
-                  <a:lnTo>
-                    <a:pt x="1002715" y="287813"/>
-                  </a:lnTo>
-                  <a:lnTo>
-                    <a:pt x="931092" y="292596"/>
-                  </a:lnTo>
-                  <a:lnTo>
-                    <a:pt x="859470" y="297337"/>
-                  </a:lnTo>
-                  <a:lnTo>
-                    <a:pt x="787847" y="302036"/>
-                  </a:lnTo>
-                  <a:lnTo>
-                    <a:pt x="716225" y="306694"/>
-                  </a:lnTo>
-                  <a:lnTo>
-                    <a:pt x="644602" y="311310"/>
-                  </a:lnTo>
-                  <a:lnTo>
-                    <a:pt x="572980" y="315885"/>
-                  </a:lnTo>
-                  <a:lnTo>
-                    <a:pt x="501357" y="320419"/>
-                  </a:lnTo>
-                  <a:lnTo>
-                    <a:pt x="429735" y="324913"/>
-                  </a:lnTo>
-                  <a:lnTo>
-                    <a:pt x="358112" y="329368"/>
-                  </a:lnTo>
-                  <a:lnTo>
-                    <a:pt x="286490" y="333782"/>
-                  </a:lnTo>
-                  <a:lnTo>
-                    <a:pt x="214867" y="338158"/>
-                  </a:lnTo>
-                  <a:lnTo>
-                    <a:pt x="143245" y="342495"/>
-                  </a:lnTo>
-                  <a:lnTo>
-                    <a:pt x="71622" y="346793"/>
-                  </a:lnTo>
-                  <a:lnTo>
-                    <a:pt x="0" y="351053"/>
+                    <a:pt x="4368974" y="6863"/>
+                  </a:lnTo>
+                  <a:lnTo>
+                    <a:pt x="4297351" y="13670"/>
+                  </a:lnTo>
+                  <a:lnTo>
+                    <a:pt x="4225729" y="20419"/>
+                  </a:lnTo>
+                  <a:lnTo>
+                    <a:pt x="4154106" y="27113"/>
+                  </a:lnTo>
+                  <a:lnTo>
+                    <a:pt x="4082483" y="33751"/>
+                  </a:lnTo>
+                  <a:lnTo>
+                    <a:pt x="4010861" y="40334"/>
+                  </a:lnTo>
+                  <a:lnTo>
+                    <a:pt x="3939238" y="46862"/>
+                  </a:lnTo>
+                  <a:lnTo>
+                    <a:pt x="3867616" y="53336"/>
+                  </a:lnTo>
+                  <a:lnTo>
+                    <a:pt x="3795993" y="59756"/>
+                  </a:lnTo>
+                  <a:lnTo>
+                    <a:pt x="3724371" y="66122"/>
+                  </a:lnTo>
+                  <a:lnTo>
+                    <a:pt x="3652748" y="72436"/>
+                  </a:lnTo>
+                  <a:lnTo>
+                    <a:pt x="3581126" y="78697"/>
+                  </a:lnTo>
+                  <a:lnTo>
+                    <a:pt x="3509503" y="84906"/>
+                  </a:lnTo>
+                  <a:lnTo>
+                    <a:pt x="3437881" y="91063"/>
+                  </a:lnTo>
+                  <a:lnTo>
+                    <a:pt x="3366258" y="97170"/>
+                  </a:lnTo>
+                  <a:lnTo>
+                    <a:pt x="3294636" y="103225"/>
+                  </a:lnTo>
+                  <a:lnTo>
+                    <a:pt x="3223013" y="109230"/>
+                  </a:lnTo>
+                  <a:lnTo>
+                    <a:pt x="3151391" y="115185"/>
+                  </a:lnTo>
+                  <a:lnTo>
+                    <a:pt x="3079768" y="121091"/>
+                  </a:lnTo>
+                  <a:lnTo>
+                    <a:pt x="3008146" y="126947"/>
+                  </a:lnTo>
+                  <a:lnTo>
+                    <a:pt x="2936523" y="132755"/>
+                  </a:lnTo>
+                  <a:lnTo>
+                    <a:pt x="2864901" y="138514"/>
+                  </a:lnTo>
+                  <a:lnTo>
+                    <a:pt x="2793278" y="144226"/>
+                  </a:lnTo>
+                  <a:lnTo>
+                    <a:pt x="2721655" y="149890"/>
+                  </a:lnTo>
+                  <a:lnTo>
+                    <a:pt x="2650033" y="155507"/>
+                  </a:lnTo>
+                  <a:lnTo>
+                    <a:pt x="2578410" y="161077"/>
+                  </a:lnTo>
+                  <a:lnTo>
+                    <a:pt x="2506788" y="166601"/>
+                  </a:lnTo>
+                  <a:lnTo>
+                    <a:pt x="2435165" y="172079"/>
+                  </a:lnTo>
+                  <a:lnTo>
+                    <a:pt x="2363543" y="177511"/>
+                  </a:lnTo>
+                  <a:lnTo>
+                    <a:pt x="2291920" y="182898"/>
+                  </a:lnTo>
+                  <a:lnTo>
+                    <a:pt x="2220298" y="188241"/>
+                  </a:lnTo>
+                  <a:lnTo>
+                    <a:pt x="2148675" y="193539"/>
+                  </a:lnTo>
+                  <a:lnTo>
+                    <a:pt x="2077053" y="198792"/>
+                  </a:lnTo>
+                  <a:lnTo>
+                    <a:pt x="2005430" y="204003"/>
+                  </a:lnTo>
+                  <a:lnTo>
+                    <a:pt x="1933808" y="209169"/>
+                  </a:lnTo>
+                  <a:lnTo>
+                    <a:pt x="1862185" y="214293"/>
+                  </a:lnTo>
+                  <a:lnTo>
+                    <a:pt x="1790563" y="219375"/>
+                  </a:lnTo>
+                  <a:lnTo>
+                    <a:pt x="1718940" y="224414"/>
+                  </a:lnTo>
+                  <a:lnTo>
+                    <a:pt x="1647318" y="229411"/>
+                  </a:lnTo>
+                  <a:lnTo>
+                    <a:pt x="1575695" y="234366"/>
+                  </a:lnTo>
+                  <a:lnTo>
+                    <a:pt x="1504073" y="239281"/>
+                  </a:lnTo>
+                  <a:lnTo>
+                    <a:pt x="1432450" y="244154"/>
+                  </a:lnTo>
+                  <a:lnTo>
+                    <a:pt x="1360827" y="248987"/>
+                  </a:lnTo>
+                  <a:lnTo>
+                    <a:pt x="1289205" y="253780"/>
+                  </a:lnTo>
+                  <a:lnTo>
+                    <a:pt x="1217582" y="258532"/>
+                  </a:lnTo>
+                  <a:lnTo>
+                    <a:pt x="1145960" y="263246"/>
+                  </a:lnTo>
+                  <a:lnTo>
+                    <a:pt x="1074337" y="267920"/>
+                  </a:lnTo>
+                  <a:lnTo>
+                    <a:pt x="1002715" y="272555"/>
+                  </a:lnTo>
+                  <a:lnTo>
+                    <a:pt x="931092" y="277152"/>
+                  </a:lnTo>
+                  <a:lnTo>
+                    <a:pt x="859470" y="281710"/>
+                  </a:lnTo>
+                  <a:lnTo>
+                    <a:pt x="787847" y="286231"/>
+                  </a:lnTo>
+                  <a:lnTo>
+                    <a:pt x="716225" y="290714"/>
+                  </a:lnTo>
+                  <a:lnTo>
+                    <a:pt x="644602" y="295160"/>
+                  </a:lnTo>
+                  <a:lnTo>
+                    <a:pt x="572980" y="299568"/>
+                  </a:lnTo>
+                  <a:lnTo>
+                    <a:pt x="501357" y="303940"/>
+                  </a:lnTo>
+                  <a:lnTo>
+                    <a:pt x="429735" y="308276"/>
+                  </a:lnTo>
+                  <a:lnTo>
+                    <a:pt x="358112" y="312576"/>
+                  </a:lnTo>
+                  <a:lnTo>
+                    <a:pt x="286490" y="316839"/>
+                  </a:lnTo>
+                  <a:lnTo>
+                    <a:pt x="214867" y="321068"/>
+                  </a:lnTo>
+                  <a:lnTo>
+                    <a:pt x="143245" y="325261"/>
+                  </a:lnTo>
+                  <a:lnTo>
+                    <a:pt x="71622" y="329419"/>
+                  </a:lnTo>
+                  <a:lnTo>
+                    <a:pt x="0" y="333543"/>
                   </a:lnTo>
                 </a:path>
               </a:pathLst>
@@ -4197,312 +4197,312 @@
           </p:nvSpPr>
           <p:spPr>
             <a:xfrm>
-              <a:off x="1172049" y="4416490"/>
-              <a:ext cx="7090630" cy="453053"/>
+              <a:off x="1172049" y="4374798"/>
+              <a:ext cx="7090630" cy="507453"/>
             </a:xfrm>
             <a:custGeom>
               <a:avLst/>
               <a:pathLst>
-                <a:path w="7090630" h="453053">
+                <a:path w="7090630" h="507453">
                   <a:moveTo>
                     <a:pt x="0" y="0"/>
                   </a:moveTo>
                   <a:lnTo>
-                    <a:pt x="71622" y="5816"/>
-                  </a:lnTo>
-                  <a:lnTo>
-                    <a:pt x="143245" y="11603"/>
-                  </a:lnTo>
-                  <a:lnTo>
-                    <a:pt x="214867" y="17361"/>
-                  </a:lnTo>
-                  <a:lnTo>
-                    <a:pt x="286490" y="23089"/>
-                  </a:lnTo>
-                  <a:lnTo>
-                    <a:pt x="358112" y="28788"/>
-                  </a:lnTo>
-                  <a:lnTo>
-                    <a:pt x="429735" y="34458"/>
-                  </a:lnTo>
-                  <a:lnTo>
-                    <a:pt x="501357" y="40099"/>
-                  </a:lnTo>
-                  <a:lnTo>
-                    <a:pt x="572980" y="45711"/>
-                  </a:lnTo>
-                  <a:lnTo>
-                    <a:pt x="644602" y="51295"/>
-                  </a:lnTo>
-                  <a:lnTo>
-                    <a:pt x="716225" y="56850"/>
-                  </a:lnTo>
-                  <a:lnTo>
-                    <a:pt x="787847" y="62376"/>
-                  </a:lnTo>
-                  <a:lnTo>
-                    <a:pt x="859470" y="67875"/>
-                  </a:lnTo>
-                  <a:lnTo>
-                    <a:pt x="931092" y="73346"/>
-                  </a:lnTo>
-                  <a:lnTo>
-                    <a:pt x="1002715" y="78788"/>
-                  </a:lnTo>
-                  <a:lnTo>
-                    <a:pt x="1074337" y="84203"/>
-                  </a:lnTo>
-                  <a:lnTo>
-                    <a:pt x="1145960" y="89591"/>
-                  </a:lnTo>
-                  <a:lnTo>
-                    <a:pt x="1217582" y="94950"/>
-                  </a:lnTo>
-                  <a:lnTo>
-                    <a:pt x="1289205" y="100283"/>
-                  </a:lnTo>
-                  <a:lnTo>
-                    <a:pt x="1360827" y="105588"/>
-                  </a:lnTo>
-                  <a:lnTo>
-                    <a:pt x="1432450" y="110867"/>
-                  </a:lnTo>
-                  <a:lnTo>
-                    <a:pt x="1504073" y="116118"/>
-                  </a:lnTo>
-                  <a:lnTo>
-                    <a:pt x="1575695" y="121343"/>
-                  </a:lnTo>
-                  <a:lnTo>
-                    <a:pt x="1647318" y="126541"/>
-                  </a:lnTo>
-                  <a:lnTo>
-                    <a:pt x="1718940" y="131712"/>
-                  </a:lnTo>
-                  <a:lnTo>
-                    <a:pt x="1790563" y="136857"/>
-                  </a:lnTo>
-                  <a:lnTo>
-                    <a:pt x="1862185" y="141976"/>
-                  </a:lnTo>
-                  <a:lnTo>
-                    <a:pt x="1933808" y="147069"/>
-                  </a:lnTo>
-                  <a:lnTo>
-                    <a:pt x="2005430" y="152136"/>
-                  </a:lnTo>
-                  <a:lnTo>
-                    <a:pt x="2077053" y="157176"/>
-                  </a:lnTo>
-                  <a:lnTo>
-                    <a:pt x="2148675" y="162192"/>
-                  </a:lnTo>
-                  <a:lnTo>
-                    <a:pt x="2220298" y="167181"/>
-                  </a:lnTo>
-                  <a:lnTo>
-                    <a:pt x="2291920" y="172146"/>
-                  </a:lnTo>
-                  <a:lnTo>
-                    <a:pt x="2363543" y="177085"/>
-                  </a:lnTo>
-                  <a:lnTo>
-                    <a:pt x="2435165" y="181998"/>
-                  </a:lnTo>
-                  <a:lnTo>
-                    <a:pt x="2506788" y="186887"/>
-                  </a:lnTo>
-                  <a:lnTo>
-                    <a:pt x="2578410" y="191751"/>
-                  </a:lnTo>
-                  <a:lnTo>
-                    <a:pt x="2650033" y="196590"/>
-                  </a:lnTo>
-                  <a:lnTo>
-                    <a:pt x="2721655" y="201404"/>
-                  </a:lnTo>
-                  <a:lnTo>
-                    <a:pt x="2793278" y="206194"/>
-                  </a:lnTo>
-                  <a:lnTo>
-                    <a:pt x="2864901" y="210959"/>
-                  </a:lnTo>
-                  <a:lnTo>
-                    <a:pt x="2936523" y="215700"/>
-                  </a:lnTo>
-                  <a:lnTo>
-                    <a:pt x="3008146" y="220417"/>
-                  </a:lnTo>
-                  <a:lnTo>
-                    <a:pt x="3079768" y="225110"/>
-                  </a:lnTo>
-                  <a:lnTo>
-                    <a:pt x="3151391" y="229778"/>
-                  </a:lnTo>
-                  <a:lnTo>
-                    <a:pt x="3223013" y="234423"/>
-                  </a:lnTo>
-                  <a:lnTo>
-                    <a:pt x="3294636" y="239045"/>
-                  </a:lnTo>
-                  <a:lnTo>
-                    <a:pt x="3366258" y="243643"/>
-                  </a:lnTo>
-                  <a:lnTo>
-                    <a:pt x="3437881" y="248217"/>
-                  </a:lnTo>
-                  <a:lnTo>
-                    <a:pt x="3509503" y="252768"/>
-                  </a:lnTo>
-                  <a:lnTo>
-                    <a:pt x="3581126" y="257296"/>
-                  </a:lnTo>
-                  <a:lnTo>
-                    <a:pt x="3652748" y="261801"/>
-                  </a:lnTo>
-                  <a:lnTo>
-                    <a:pt x="3724371" y="266282"/>
-                  </a:lnTo>
-                  <a:lnTo>
-                    <a:pt x="3795993" y="270741"/>
-                  </a:lnTo>
-                  <a:lnTo>
-                    <a:pt x="3867616" y="275177"/>
-                  </a:lnTo>
-                  <a:lnTo>
-                    <a:pt x="3939238" y="279591"/>
-                  </a:lnTo>
-                  <a:lnTo>
-                    <a:pt x="4010861" y="283982"/>
-                  </a:lnTo>
-                  <a:lnTo>
-                    <a:pt x="4082483" y="288351"/>
-                  </a:lnTo>
-                  <a:lnTo>
-                    <a:pt x="4154106" y="292697"/>
-                  </a:lnTo>
-                  <a:lnTo>
-                    <a:pt x="4225729" y="297021"/>
-                  </a:lnTo>
-                  <a:lnTo>
-                    <a:pt x="4297351" y="301324"/>
-                  </a:lnTo>
-                  <a:lnTo>
-                    <a:pt x="4368974" y="305604"/>
-                  </a:lnTo>
-                  <a:lnTo>
-                    <a:pt x="4440596" y="309862"/>
-                  </a:lnTo>
-                  <a:lnTo>
-                    <a:pt x="4512219" y="314099"/>
-                  </a:lnTo>
-                  <a:lnTo>
-                    <a:pt x="4583841" y="318314"/>
-                  </a:lnTo>
-                  <a:lnTo>
-                    <a:pt x="4655464" y="322508"/>
-                  </a:lnTo>
-                  <a:lnTo>
-                    <a:pt x="4727086" y="326680"/>
-                  </a:lnTo>
-                  <a:lnTo>
-                    <a:pt x="4798709" y="330831"/>
-                  </a:lnTo>
-                  <a:lnTo>
-                    <a:pt x="4870331" y="334961"/>
-                  </a:lnTo>
-                  <a:lnTo>
-                    <a:pt x="4941954" y="339069"/>
-                  </a:lnTo>
-                  <a:lnTo>
-                    <a:pt x="5013576" y="343157"/>
-                  </a:lnTo>
-                  <a:lnTo>
-                    <a:pt x="5085199" y="347224"/>
-                  </a:lnTo>
-                  <a:lnTo>
-                    <a:pt x="5156821" y="351270"/>
-                  </a:lnTo>
-                  <a:lnTo>
-                    <a:pt x="5228444" y="355296"/>
-                  </a:lnTo>
-                  <a:lnTo>
-                    <a:pt x="5300066" y="359301"/>
-                  </a:lnTo>
-                  <a:lnTo>
-                    <a:pt x="5371689" y="363285"/>
-                  </a:lnTo>
-                  <a:lnTo>
-                    <a:pt x="5443311" y="367250"/>
-                  </a:lnTo>
-                  <a:lnTo>
-                    <a:pt x="5514934" y="371194"/>
-                  </a:lnTo>
-                  <a:lnTo>
-                    <a:pt x="5586557" y="375118"/>
-                  </a:lnTo>
-                  <a:lnTo>
-                    <a:pt x="5658179" y="379022"/>
-                  </a:lnTo>
-                  <a:lnTo>
-                    <a:pt x="5729802" y="382906"/>
-                  </a:lnTo>
-                  <a:lnTo>
-                    <a:pt x="5801424" y="386770"/>
-                  </a:lnTo>
-                  <a:lnTo>
-                    <a:pt x="5873047" y="390615"/>
-                  </a:lnTo>
-                  <a:lnTo>
-                    <a:pt x="5944669" y="394440"/>
-                  </a:lnTo>
-                  <a:lnTo>
-                    <a:pt x="6016292" y="398245"/>
-                  </a:lnTo>
-                  <a:lnTo>
-                    <a:pt x="6087914" y="402031"/>
-                  </a:lnTo>
-                  <a:lnTo>
-                    <a:pt x="6159537" y="405798"/>
-                  </a:lnTo>
-                  <a:lnTo>
-                    <a:pt x="6231159" y="409545"/>
-                  </a:lnTo>
-                  <a:lnTo>
-                    <a:pt x="6302782" y="413274"/>
-                  </a:lnTo>
-                  <a:lnTo>
-                    <a:pt x="6374404" y="416983"/>
-                  </a:lnTo>
-                  <a:lnTo>
-                    <a:pt x="6446027" y="420674"/>
-                  </a:lnTo>
-                  <a:lnTo>
-                    <a:pt x="6517649" y="424345"/>
-                  </a:lnTo>
-                  <a:lnTo>
-                    <a:pt x="6589272" y="427998"/>
-                  </a:lnTo>
-                  <a:lnTo>
-                    <a:pt x="6660894" y="431633"/>
-                  </a:lnTo>
-                  <a:lnTo>
-                    <a:pt x="6732517" y="435249"/>
-                  </a:lnTo>
-                  <a:lnTo>
-                    <a:pt x="6804139" y="438846"/>
-                  </a:lnTo>
-                  <a:lnTo>
-                    <a:pt x="6875762" y="442425"/>
-                  </a:lnTo>
-                  <a:lnTo>
-                    <a:pt x="6947385" y="445986"/>
-                  </a:lnTo>
-                  <a:lnTo>
-                    <a:pt x="7019007" y="449528"/>
-                  </a:lnTo>
-                  <a:lnTo>
-                    <a:pt x="7090630" y="453053"/>
+                    <a:pt x="71622" y="6677"/>
+                  </a:lnTo>
+                  <a:lnTo>
+                    <a:pt x="143245" y="13316"/>
+                  </a:lnTo>
+                  <a:lnTo>
+                    <a:pt x="214867" y="19918"/>
+                  </a:lnTo>
+                  <a:lnTo>
+                    <a:pt x="286490" y="26483"/>
+                  </a:lnTo>
+                  <a:lnTo>
+                    <a:pt x="358112" y="33011"/>
+                  </a:lnTo>
+                  <a:lnTo>
+                    <a:pt x="429735" y="39502"/>
+                  </a:lnTo>
+                  <a:lnTo>
+                    <a:pt x="501357" y="45956"/>
+                  </a:lnTo>
+                  <a:lnTo>
+                    <a:pt x="572980" y="52374"/>
+                  </a:lnTo>
+                  <a:lnTo>
+                    <a:pt x="644602" y="58755"/>
+                  </a:lnTo>
+                  <a:lnTo>
+                    <a:pt x="716225" y="65101"/>
+                  </a:lnTo>
+                  <a:lnTo>
+                    <a:pt x="787847" y="71410"/>
+                  </a:lnTo>
+                  <a:lnTo>
+                    <a:pt x="859470" y="77684"/>
+                  </a:lnTo>
+                  <a:lnTo>
+                    <a:pt x="931092" y="83923"/>
+                  </a:lnTo>
+                  <a:lnTo>
+                    <a:pt x="1002715" y="90126"/>
+                  </a:lnTo>
+                  <a:lnTo>
+                    <a:pt x="1074337" y="96295"/>
+                  </a:lnTo>
+                  <a:lnTo>
+                    <a:pt x="1145960" y="102428"/>
+                  </a:lnTo>
+                  <a:lnTo>
+                    <a:pt x="1217582" y="108527"/>
+                  </a:lnTo>
+                  <a:lnTo>
+                    <a:pt x="1289205" y="114592"/>
+                  </a:lnTo>
+                  <a:lnTo>
+                    <a:pt x="1360827" y="120622"/>
+                  </a:lnTo>
+                  <a:lnTo>
+                    <a:pt x="1432450" y="126618"/>
+                  </a:lnTo>
+                  <a:lnTo>
+                    <a:pt x="1504073" y="132580"/>
+                  </a:lnTo>
+                  <a:lnTo>
+                    <a:pt x="1575695" y="138509"/>
+                  </a:lnTo>
+                  <a:lnTo>
+                    <a:pt x="1647318" y="144404"/>
+                  </a:lnTo>
+                  <a:lnTo>
+                    <a:pt x="1718940" y="150266"/>
+                  </a:lnTo>
+                  <a:lnTo>
+                    <a:pt x="1790563" y="156094"/>
+                  </a:lnTo>
+                  <a:lnTo>
+                    <a:pt x="1862185" y="161890"/>
+                  </a:lnTo>
+                  <a:lnTo>
+                    <a:pt x="1933808" y="167653"/>
+                  </a:lnTo>
+                  <a:lnTo>
+                    <a:pt x="2005430" y="173384"/>
+                  </a:lnTo>
+                  <a:lnTo>
+                    <a:pt x="2077053" y="179082"/>
+                  </a:lnTo>
+                  <a:lnTo>
+                    <a:pt x="2148675" y="184748"/>
+                  </a:lnTo>
+                  <a:lnTo>
+                    <a:pt x="2220298" y="190382"/>
+                  </a:lnTo>
+                  <a:lnTo>
+                    <a:pt x="2291920" y="195984"/>
+                  </a:lnTo>
+                  <a:lnTo>
+                    <a:pt x="2363543" y="201555"/>
+                  </a:lnTo>
+                  <a:lnTo>
+                    <a:pt x="2435165" y="207094"/>
+                  </a:lnTo>
+                  <a:lnTo>
+                    <a:pt x="2506788" y="212602"/>
+                  </a:lnTo>
+                  <a:lnTo>
+                    <a:pt x="2578410" y="218078"/>
+                  </a:lnTo>
+                  <a:lnTo>
+                    <a:pt x="2650033" y="223524"/>
+                  </a:lnTo>
+                  <a:lnTo>
+                    <a:pt x="2721655" y="228939"/>
+                  </a:lnTo>
+                  <a:lnTo>
+                    <a:pt x="2793278" y="234324"/>
+                  </a:lnTo>
+                  <a:lnTo>
+                    <a:pt x="2864901" y="239678"/>
+                  </a:lnTo>
+                  <a:lnTo>
+                    <a:pt x="2936523" y="245002"/>
+                  </a:lnTo>
+                  <a:lnTo>
+                    <a:pt x="3008146" y="250295"/>
+                  </a:lnTo>
+                  <a:lnTo>
+                    <a:pt x="3079768" y="255559"/>
+                  </a:lnTo>
+                  <a:lnTo>
+                    <a:pt x="3151391" y="260793"/>
+                  </a:lnTo>
+                  <a:lnTo>
+                    <a:pt x="3223013" y="265998"/>
+                  </a:lnTo>
+                  <a:lnTo>
+                    <a:pt x="3294636" y="271173"/>
+                  </a:lnTo>
+                  <a:lnTo>
+                    <a:pt x="3366258" y="276319"/>
+                  </a:lnTo>
+                  <a:lnTo>
+                    <a:pt x="3437881" y="281436"/>
+                  </a:lnTo>
+                  <a:lnTo>
+                    <a:pt x="3509503" y="286524"/>
+                  </a:lnTo>
+                  <a:lnTo>
+                    <a:pt x="3581126" y="291583"/>
+                  </a:lnTo>
+                  <a:lnTo>
+                    <a:pt x="3652748" y="296614"/>
+                  </a:lnTo>
+                  <a:lnTo>
+                    <a:pt x="3724371" y="301616"/>
+                  </a:lnTo>
+                  <a:lnTo>
+                    <a:pt x="3795993" y="306590"/>
+                  </a:lnTo>
+                  <a:lnTo>
+                    <a:pt x="3867616" y="311536"/>
+                  </a:lnTo>
+                  <a:lnTo>
+                    <a:pt x="3939238" y="316454"/>
+                  </a:lnTo>
+                  <a:lnTo>
+                    <a:pt x="4010861" y="321345"/>
+                  </a:lnTo>
+                  <a:lnTo>
+                    <a:pt x="4082483" y="326207"/>
+                  </a:lnTo>
+                  <a:lnTo>
+                    <a:pt x="4154106" y="331042"/>
+                  </a:lnTo>
+                  <a:lnTo>
+                    <a:pt x="4225729" y="335850"/>
+                  </a:lnTo>
+                  <a:lnTo>
+                    <a:pt x="4297351" y="340631"/>
+                  </a:lnTo>
+                  <a:lnTo>
+                    <a:pt x="4368974" y="345385"/>
+                  </a:lnTo>
+                  <a:lnTo>
+                    <a:pt x="4440596" y="350112"/>
+                  </a:lnTo>
+                  <a:lnTo>
+                    <a:pt x="4512219" y="354812"/>
+                  </a:lnTo>
+                  <a:lnTo>
+                    <a:pt x="4583841" y="359486"/>
+                  </a:lnTo>
+                  <a:lnTo>
+                    <a:pt x="4655464" y="364133"/>
+                  </a:lnTo>
+                  <a:lnTo>
+                    <a:pt x="4727086" y="368754"/>
+                  </a:lnTo>
+                  <a:lnTo>
+                    <a:pt x="4798709" y="373349"/>
+                  </a:lnTo>
+                  <a:lnTo>
+                    <a:pt x="4870331" y="377918"/>
+                  </a:lnTo>
+                  <a:lnTo>
+                    <a:pt x="4941954" y="382461"/>
+                  </a:lnTo>
+                  <a:lnTo>
+                    <a:pt x="5013576" y="386978"/>
+                  </a:lnTo>
+                  <a:lnTo>
+                    <a:pt x="5085199" y="391471"/>
+                  </a:lnTo>
+                  <a:lnTo>
+                    <a:pt x="5156821" y="395937"/>
+                  </a:lnTo>
+                  <a:lnTo>
+                    <a:pt x="5228444" y="400379"/>
+                  </a:lnTo>
+                  <a:lnTo>
+                    <a:pt x="5300066" y="404795"/>
+                  </a:lnTo>
+                  <a:lnTo>
+                    <a:pt x="5371689" y="409186"/>
+                  </a:lnTo>
+                  <a:lnTo>
+                    <a:pt x="5443311" y="413553"/>
+                  </a:lnTo>
+                  <a:lnTo>
+                    <a:pt x="5514934" y="417895"/>
+                  </a:lnTo>
+                  <a:lnTo>
+                    <a:pt x="5586557" y="422212"/>
+                  </a:lnTo>
+                  <a:lnTo>
+                    <a:pt x="5658179" y="426505"/>
+                  </a:lnTo>
+                  <a:lnTo>
+                    <a:pt x="5729802" y="430774"/>
+                  </a:lnTo>
+                  <a:lnTo>
+                    <a:pt x="5801424" y="435019"/>
+                  </a:lnTo>
+                  <a:lnTo>
+                    <a:pt x="5873047" y="439240"/>
+                  </a:lnTo>
+                  <a:lnTo>
+                    <a:pt x="5944669" y="443437"/>
+                  </a:lnTo>
+                  <a:lnTo>
+                    <a:pt x="6016292" y="447610"/>
+                  </a:lnTo>
+                  <a:lnTo>
+                    <a:pt x="6087914" y="451759"/>
+                  </a:lnTo>
+                  <a:lnTo>
+                    <a:pt x="6159537" y="455886"/>
+                  </a:lnTo>
+                  <a:lnTo>
+                    <a:pt x="6231159" y="459988"/>
+                  </a:lnTo>
+                  <a:lnTo>
+                    <a:pt x="6302782" y="464068"/>
+                  </a:lnTo>
+                  <a:lnTo>
+                    <a:pt x="6374404" y="468125"/>
+                  </a:lnTo>
+                  <a:lnTo>
+                    <a:pt x="6446027" y="472159"/>
+                  </a:lnTo>
+                  <a:lnTo>
+                    <a:pt x="6517649" y="476170"/>
+                  </a:lnTo>
+                  <a:lnTo>
+                    <a:pt x="6589272" y="480158"/>
+                  </a:lnTo>
+                  <a:lnTo>
+                    <a:pt x="6660894" y="484124"/>
+                  </a:lnTo>
+                  <a:lnTo>
+                    <a:pt x="6732517" y="488067"/>
+                  </a:lnTo>
+                  <a:lnTo>
+                    <a:pt x="6804139" y="491988"/>
+                  </a:lnTo>
+                  <a:lnTo>
+                    <a:pt x="6875762" y="495887"/>
+                  </a:lnTo>
+                  <a:lnTo>
+                    <a:pt x="6947385" y="499764"/>
+                  </a:lnTo>
+                  <a:lnTo>
+                    <a:pt x="7019007" y="503620"/>
+                  </a:lnTo>
+                  <a:lnTo>
+                    <a:pt x="7090630" y="507453"/>
                   </a:lnTo>
                 </a:path>
               </a:pathLst>
@@ -4574,7 +4574,7 @@
           </p:nvSpPr>
           <p:spPr>
             <a:xfrm>
-              <a:off x="5636831" y="2073503"/>
+              <a:off x="5656410" y="2073503"/>
               <a:ext cx="0" cy="3649639"/>
             </a:xfrm>
             <a:custGeom>
@@ -4617,7 +4617,7 @@
           </p:nvSpPr>
           <p:spPr>
             <a:xfrm>
-              <a:off x="4328179" y="2073503"/>
+              <a:off x="4335733" y="2073503"/>
               <a:ext cx="0" cy="3649639"/>
             </a:xfrm>
             <a:custGeom>
@@ -4660,7 +4660,7 @@
           </p:nvSpPr>
           <p:spPr>
             <a:xfrm>
-              <a:off x="6683624" y="2073503"/>
+              <a:off x="6684598" y="2073503"/>
               <a:ext cx="0" cy="3649639"/>
             </a:xfrm>
             <a:custGeom>
@@ -4933,7 +4933,7 @@
           </p:nvSpPr>
           <p:spPr>
             <a:xfrm>
-              <a:off x="2970385" y="5785772"/>
+              <a:off x="2971977" y="5785772"/>
               <a:ext cx="161574" cy="80101"/>
             </a:xfrm>
             <a:prstGeom prst="rect">
@@ -4979,7 +4979,7 @@
           </p:nvSpPr>
           <p:spPr>
             <a:xfrm>
-              <a:off x="5501440" y="5785772"/>
+              <a:off x="5499574" y="5785772"/>
               <a:ext cx="62179" cy="80101"/>
             </a:xfrm>
             <a:prstGeom prst="rect">
@@ -5025,7 +5025,7 @@
           </p:nvSpPr>
           <p:spPr>
             <a:xfrm>
-              <a:off x="7951708" y="5785772"/>
+              <a:off x="7946384" y="5785772"/>
               <a:ext cx="124358" cy="80101"/>
             </a:xfrm>
             <a:prstGeom prst="rect">
@@ -5196,7 +5196,7 @@
                   <a:latin typeface="Helvetica"/>
                   <a:cs typeface="Helvetica"/>
                 </a:rPr>
-                <a:t>subHR per 10 mL/min decline: 1.07 (0.88-1.30), p_Bonf = 1.000 (n = 6)  |  per IQR decline (Δ = 23.7): 1.18 (0.75-1.88)  |  IQR: [-12.1, 11.6]</a:t>
+                <a:t>subHR per 10 mL/min decline: 1.08 (0.89-1.31), p_Bonf = 1.000 (n = 6)  |  per IQR decline (Δ = 23.7): 1.20 (0.76-1.91)  |  IQR: [-12.1, 11.6]</a:t>
               </a:r>
             </a:p>
           </p:txBody>
